--- a/slides/AI Fundamentals for Healthcare - Session 3 - Deep Learning and Generative AI.pptx
+++ b/slides/AI Fundamentals for Healthcare - Session 3 - Deep Learning and Generative AI.pptx
@@ -5,46 +5,45 @@
     <p:sldMasterId id="2147483840" r:id="rId1"/>
   </p:sldMasterIdLst>
   <p:notesMasterIdLst>
-    <p:notesMasterId r:id="rId98"/>
+    <p:notesMasterId r:id="rId38"/>
   </p:notesMasterIdLst>
   <p:sldIdLst>
     <p:sldId id="264" r:id="rId2"/>
-    <p:sldId id="924" r:id="rId103"/>
-    <p:sldId id="283" r:id="rId95"/>
-    <p:sldId id="309" r:id="rId69"/>
-    <p:sldId id="305" r:id="rId72"/>
-    <p:sldId id="923" r:id="rId73"/>
-    <p:sldId id="306" r:id="rId74"/>
-    <p:sldId id="307" r:id="rId75"/>
-    <p:sldId id="303" r:id="rId76"/>
-    <p:sldId id="300" r:id="rId79"/>
-    <p:sldId id="302" r:id="rId77"/>
-    <p:sldId id="298" r:id="rId80"/>
-    <p:sldId id="297" r:id="rId81"/>
-    <p:sldId id="296" r:id="rId83"/>
-    <p:sldId id="295" r:id="rId84"/>
-    <p:sldId id="294" r:id="rId85"/>
-    <p:sldId id="292" r:id="rId86"/>
-    <p:sldId id="290" r:id="rId87"/>
-    <p:sldId id="286" r:id="rId92"/>
-    <p:sldId id="925" r:id="rId104"/>
-    <p:sldId id="926" r:id="rId105"/>
-    <p:sldId id="284" r:id="rId93"/>
-    <p:sldId id="301" r:id="rId78"/>
-    <p:sldId id="319" r:id="rId54"/>
-    <p:sldId id="318" r:id="rId55"/>
-    <p:sldId id="317" r:id="rId56"/>
-    <p:sldId id="315" r:id="rId57"/>
-    <p:sldId id="311" r:id="rId67"/>
-    <p:sldId id="304" r:id="rId70"/>
-    <p:sldId id="308" r:id="rId71"/>
-    <p:sldId id="312" r:id="rId66"/>
-    <p:sldId id="927" r:id="rId106"/>
-    <p:sldId id="928" r:id="rId107"/>
-    <p:sldId id="929" r:id="rId108"/>
-    <p:sldId id="285" r:id="rId94"/>
-    <p:sldId id="930" r:id="rId109"/>
-    <p:sldId id="920" r:id="rId45"/>
+    <p:sldId id="924" r:id="rId3"/>
+    <p:sldId id="283" r:id="rId4"/>
+    <p:sldId id="309" r:id="rId5"/>
+    <p:sldId id="305" r:id="rId6"/>
+    <p:sldId id="923" r:id="rId7"/>
+    <p:sldId id="306" r:id="rId8"/>
+    <p:sldId id="307" r:id="rId9"/>
+    <p:sldId id="303" r:id="rId10"/>
+    <p:sldId id="300" r:id="rId11"/>
+    <p:sldId id="302" r:id="rId12"/>
+    <p:sldId id="298" r:id="rId13"/>
+    <p:sldId id="297" r:id="rId14"/>
+    <p:sldId id="296" r:id="rId15"/>
+    <p:sldId id="295" r:id="rId16"/>
+    <p:sldId id="294" r:id="rId17"/>
+    <p:sldId id="292" r:id="rId18"/>
+    <p:sldId id="290" r:id="rId19"/>
+    <p:sldId id="286" r:id="rId20"/>
+    <p:sldId id="925" r:id="rId21"/>
+    <p:sldId id="926" r:id="rId22"/>
+    <p:sldId id="284" r:id="rId23"/>
+    <p:sldId id="301" r:id="rId24"/>
+    <p:sldId id="319" r:id="rId25"/>
+    <p:sldId id="318" r:id="rId26"/>
+    <p:sldId id="317" r:id="rId27"/>
+    <p:sldId id="315" r:id="rId28"/>
+    <p:sldId id="304" r:id="rId29"/>
+    <p:sldId id="308" r:id="rId30"/>
+    <p:sldId id="312" r:id="rId31"/>
+    <p:sldId id="927" r:id="rId32"/>
+    <p:sldId id="928" r:id="rId33"/>
+    <p:sldId id="929" r:id="rId34"/>
+    <p:sldId id="285" r:id="rId35"/>
+    <p:sldId id="930" r:id="rId36"/>
+    <p:sldId id="920" r:id="rId37"/>
   </p:sldIdLst>
   <p:sldSz cx="12192000" cy="6858000"/>
   <p:notesSz cx="6858000" cy="9144000"/>
@@ -162,6 +161,88 @@
 </p:presentation>
 </file>
 
+<file path=ppt/changesInfos/changesInfo1.xml><?xml version="1.0" encoding="utf-8"?>
+<pc:chgInfo xmlns:a="http://schemas.openxmlformats.org/drawingml/2006/main" xmlns:r="http://schemas.openxmlformats.org/officeDocument/2006/relationships" xmlns:ac="http://schemas.microsoft.com/office/drawing/2013/main/command" xmlns:pc="http://schemas.microsoft.com/office/powerpoint/2013/main/command">
+  <pc:docChgLst>
+    <pc:chgData name="Randy Giffen" userId="ba4c5031-b453-4aba-8832-4fb595fd4791" providerId="ADAL" clId="{2D00DA38-F308-5605-9C23-544637B15DA9}"/>
+    <pc:docChg chg="custSel delSld modSld">
+      <pc:chgData name="Randy Giffen" userId="ba4c5031-b453-4aba-8832-4fb595fd4791" providerId="ADAL" clId="{2D00DA38-F308-5605-9C23-544637B15DA9}" dt="2026-10-03T15:13:43.402" v="6" actId="478"/>
+      <pc:docMkLst>
+        <pc:docMk/>
+      </pc:docMkLst>
+      <pc:sldChg chg="delSp mod">
+        <pc:chgData name="Randy Giffen" userId="ba4c5031-b453-4aba-8832-4fb595fd4791" providerId="ADAL" clId="{2D00DA38-F308-5605-9C23-544637B15DA9}" dt="2026-10-03T15:11:49.795" v="1" actId="478"/>
+        <pc:sldMkLst>
+          <pc:docMk/>
+          <pc:sldMk cId="1917997180" sldId="264"/>
+        </pc:sldMkLst>
+        <pc:spChg chg="del">
+          <ac:chgData name="Randy Giffen" userId="ba4c5031-b453-4aba-8832-4fb595fd4791" providerId="ADAL" clId="{2D00DA38-F308-5605-9C23-544637B15DA9}" dt="2026-10-03T15:11:47.652" v="0" actId="478"/>
+          <ac:spMkLst>
+            <pc:docMk/>
+            <pc:sldMk cId="1917997180" sldId="264"/>
+            <ac:spMk id="5" creationId="{00000000-0000-0000-0000-000000000000}"/>
+          </ac:spMkLst>
+        </pc:spChg>
+        <pc:spChg chg="del">
+          <ac:chgData name="Randy Giffen" userId="ba4c5031-b453-4aba-8832-4fb595fd4791" providerId="ADAL" clId="{2D00DA38-F308-5605-9C23-544637B15DA9}" dt="2026-10-03T15:11:49.795" v="1" actId="478"/>
+          <ac:spMkLst>
+            <pc:docMk/>
+            <pc:sldMk cId="1917997180" sldId="264"/>
+            <ac:spMk id="6" creationId="{00000000-0000-0000-0000-000000000000}"/>
+          </ac:spMkLst>
+        </pc:spChg>
+      </pc:sldChg>
+      <pc:sldChg chg="del">
+        <pc:chgData name="Randy Giffen" userId="ba4c5031-b453-4aba-8832-4fb595fd4791" providerId="ADAL" clId="{2D00DA38-F308-5605-9C23-544637B15DA9}" dt="2026-10-03T15:13:15.090" v="5" actId="2696"/>
+        <pc:sldMkLst>
+          <pc:docMk/>
+          <pc:sldMk cId="3299368034" sldId="311"/>
+        </pc:sldMkLst>
+      </pc:sldChg>
+      <pc:sldChg chg="delSp mod">
+        <pc:chgData name="Randy Giffen" userId="ba4c5031-b453-4aba-8832-4fb595fd4791" providerId="ADAL" clId="{2D00DA38-F308-5605-9C23-544637B15DA9}" dt="2026-10-03T15:13:43.402" v="6" actId="478"/>
+        <pc:sldMkLst>
+          <pc:docMk/>
+          <pc:sldMk cId="477962660" sldId="920"/>
+        </pc:sldMkLst>
+        <pc:picChg chg="del">
+          <ac:chgData name="Randy Giffen" userId="ba4c5031-b453-4aba-8832-4fb595fd4791" providerId="ADAL" clId="{2D00DA38-F308-5605-9C23-544637B15DA9}" dt="2026-10-03T15:13:43.402" v="6" actId="478"/>
+          <ac:picMkLst>
+            <pc:docMk/>
+            <pc:sldMk cId="477962660" sldId="920"/>
+            <ac:picMk id="3" creationId="{0AD34D1E-A83B-4094-141E-C3D13FA3927C}"/>
+          </ac:picMkLst>
+        </pc:picChg>
+      </pc:sldChg>
+      <pc:sldChg chg="modSp mod">
+        <pc:chgData name="Randy Giffen" userId="ba4c5031-b453-4aba-8832-4fb595fd4791" providerId="ADAL" clId="{2D00DA38-F308-5605-9C23-544637B15DA9}" dt="2026-10-03T15:12:25.305" v="4" actId="1076"/>
+        <pc:sldMkLst>
+          <pc:docMk/>
+          <pc:sldMk cId="0" sldId="925"/>
+        </pc:sldMkLst>
+        <pc:spChg chg="mod">
+          <ac:chgData name="Randy Giffen" userId="ba4c5031-b453-4aba-8832-4fb595fd4791" providerId="ADAL" clId="{2D00DA38-F308-5605-9C23-544637B15DA9}" dt="2026-10-03T15:12:25.305" v="4" actId="1076"/>
+          <ac:spMkLst>
+            <pc:docMk/>
+            <pc:sldMk cId="0" sldId="925"/>
+            <ac:spMk id="3" creationId="{00000000-0000-0000-0000-000000000000}"/>
+          </ac:spMkLst>
+        </pc:spChg>
+        <pc:spChg chg="mod">
+          <ac:chgData name="Randy Giffen" userId="ba4c5031-b453-4aba-8832-4fb595fd4791" providerId="ADAL" clId="{2D00DA38-F308-5605-9C23-544637B15DA9}" dt="2026-10-03T15:12:20.819" v="3" actId="1076"/>
+          <ac:spMkLst>
+            <pc:docMk/>
+            <pc:sldMk cId="0" sldId="925"/>
+            <ac:spMk id="5" creationId="{00000000-0000-0000-0000-000000000000}"/>
+          </ac:spMkLst>
+        </pc:spChg>
+      </pc:sldChg>
+    </pc:docChg>
+  </pc:docChgLst>
+</pc:chgInfo>
+</file>
+
 <file path=ppt/notesMasters/notesMaster1.xml><?xml version="1.0" encoding="utf-8"?>
 <p:notesMaster xmlns:a="http://schemas.openxmlformats.org/drawingml/2006/main" xmlns:r="http://schemas.openxmlformats.org/officeDocument/2006/relationships" xmlns:p="http://schemas.openxmlformats.org/presentationml/2006/main">
   <p:cSld>
@@ -244,7 +325,7 @@
           <a:p>
             <a:fld id="{A77F7983-855A-2240-A9BF-6235A2B9A807}" type="datetimeFigureOut">
               <a:rPr lang="en-US" smtClean="0"/>
-              <a:t>3/11/26</a:t>
+              <a:t>10/3/26</a:t>
             </a:fld>
             <a:endParaRPr lang="en-US"/>
           </a:p>
@@ -596,7 +677,7 @@
 </file>
 
 <file path=ppt/notesSlides/notesSlide10.xml><?xml version="1.0" encoding="utf-8"?>
-<p:notes xmlns:a="http://schemas.openxmlformats.org/drawingml/2006/main" xmlns:p="http://schemas.openxmlformats.org/presentationml/2006/main" xmlns:r="http://schemas.openxmlformats.org/officeDocument/2006/relationships">
+<p:notes xmlns:a="http://schemas.openxmlformats.org/drawingml/2006/main" xmlns:r="http://schemas.openxmlformats.org/officeDocument/2006/relationships" xmlns:p="http://schemas.openxmlformats.org/presentationml/2006/main">
   <p:cSld>
     <p:spTree>
       <p:nvGrpSpPr>
@@ -616,7 +697,7 @@
         <p:nvSpPr>
           <p:cNvPr id="2" name="Slide Image Placeholder 1"/>
           <p:cNvSpPr>
-            <a:spLocks noGrp="1"/>
+            <a:spLocks noGrp="1" noRot="1" noChangeAspect="1"/>
           </p:cNvSpPr>
           <p:nvPr>
             <p:ph type="sldImg" idx="2"/>
@@ -631,7 +712,7 @@
             <a:spLocks noGrp="1"/>
           </p:cNvSpPr>
           <p:nvPr>
-            <p:ph type="body" idx="3" sz="quarter"/>
+            <p:ph type="body" sz="quarter" idx="3"/>
           </p:nvPr>
         </p:nvSpPr>
         <p:spPr/>
@@ -640,18 +721,28 @@
           <a:lstStyle/>
           <a:p>
             <a:r>
-              <a:t>Close on the last line and let it sit. The hardest part is rarely the model.</a:t>
-            </a:r>
-          </a:p>
-          <a:p/>
-          <a:p>
-            <a:r>
+              <a:t>Close on the last line and let it sit. </a:t>
+            </a:r>
+            <a:r>
+              <a:rPr dirty="0"/>
+              <a:t>The hardest part is rarely the model.</a:t>
+            </a:r>
+          </a:p>
+          <a:p>
+            <a:endParaRPr dirty="0"/>
+          </a:p>
+          <a:p>
+            <a:r>
+              <a:rPr dirty="0"/>
               <a:t>Point at the notebooks concretely, and name one that suits this particular audience.</a:t>
             </a:r>
           </a:p>
-          <a:p/>
-          <a:p>
-            <a:r>
+          <a:p>
+            <a:endParaRPr dirty="0"/>
+          </a:p>
+          <a:p>
+            <a:r>
+              <a:rPr dirty="0"/>
               <a:t>About 3 minutes.</a:t>
             </a:r>
           </a:p>
@@ -664,7 +755,7 @@
             <a:spLocks noGrp="1"/>
           </p:cNvSpPr>
           <p:nvPr>
-            <p:ph type="sldNum" idx="5" sz="quarter"/>
+            <p:ph type="sldNum" sz="quarter" idx="5"/>
           </p:nvPr>
         </p:nvSpPr>
         <p:spPr/>
@@ -678,7 +769,7 @@
 </file>
 
 <file path=ppt/notesSlides/notesSlide2.xml><?xml version="1.0" encoding="utf-8"?>
-<p:notes xmlns:a="http://schemas.openxmlformats.org/drawingml/2006/main" xmlns:p="http://schemas.openxmlformats.org/presentationml/2006/main" xmlns:r="http://schemas.openxmlformats.org/officeDocument/2006/relationships">
+<p:notes xmlns:a="http://schemas.openxmlformats.org/drawingml/2006/main" xmlns:r="http://schemas.openxmlformats.org/officeDocument/2006/relationships" xmlns:p="http://schemas.openxmlformats.org/presentationml/2006/main">
   <p:cSld>
     <p:spTree>
       <p:nvGrpSpPr>
@@ -698,7 +789,7 @@
         <p:nvSpPr>
           <p:cNvPr id="2" name="Slide Image Placeholder 1"/>
           <p:cNvSpPr>
-            <a:spLocks noGrp="1"/>
+            <a:spLocks noGrp="1" noRot="1" noChangeAspect="1"/>
           </p:cNvSpPr>
           <p:nvPr>
             <p:ph type="sldImg" idx="2"/>
@@ -713,7 +804,7 @@
             <a:spLocks noGrp="1"/>
           </p:cNvSpPr>
           <p:nvPr>
-            <p:ph type="body" idx="3" sz="quarter"/>
+            <p:ph type="body" sz="quarter" idx="3"/>
           </p:nvPr>
         </p:nvSpPr>
         <p:spPr/>
@@ -722,19 +813,7 @@
           <a:lstStyle/>
           <a:p>
             <a:r>
-              <a:t>Offer this as something to take away rather than something to read aloud. Walk the two column headings and stop.</a:t>
-            </a:r>
-          </a:p>
-          <a:p/>
-          <a:p>
-            <a:r>
-              <a:t>The item people skip is the last one on the right. Deciding regulatory status late is expensive.</a:t>
-            </a:r>
-          </a:p>
-          <a:p/>
-          <a:p>
-            <a:r>
-              <a:t>About 3 minutes.</a:t>
+              <a:t>Thirty seconds, no more. The purpose is to orient anyone who missed the previous session, not to re-teach it.</a:t>
             </a:r>
           </a:p>
         </p:txBody>
@@ -746,7 +825,7 @@
             <a:spLocks noGrp="1"/>
           </p:cNvSpPr>
           <p:nvPr>
-            <p:ph type="sldNum" idx="5" sz="quarter"/>
+            <p:ph type="sldNum" sz="quarter" idx="5"/>
           </p:nvPr>
         </p:nvSpPr>
         <p:spPr/>
@@ -760,398 +839,6 @@
 </file>
 
 <file path=ppt/notesSlides/notesSlide3.xml><?xml version="1.0" encoding="utf-8"?>
-<p:notes xmlns:a="http://schemas.openxmlformats.org/drawingml/2006/main" xmlns:p="http://schemas.openxmlformats.org/presentationml/2006/main" xmlns:r="http://schemas.openxmlformats.org/officeDocument/2006/relationships">
-  <p:cSld>
-    <p:spTree>
-      <p:nvGrpSpPr>
-        <p:cNvPr id="1" name=""/>
-        <p:cNvGrpSpPr/>
-        <p:nvPr/>
-      </p:nvGrpSpPr>
-      <p:grpSpPr>
-        <a:xfrm>
-          <a:off x="0" y="0"/>
-          <a:ext cx="0" cy="0"/>
-          <a:chOff x="0" y="0"/>
-          <a:chExt cx="0" cy="0"/>
-        </a:xfrm>
-      </p:grpSpPr>
-      <p:sp>
-        <p:nvSpPr>
-          <p:cNvPr id="2" name="Slide Image Placeholder 1"/>
-          <p:cNvSpPr>
-            <a:spLocks noGrp="1"/>
-          </p:cNvSpPr>
-          <p:nvPr>
-            <p:ph type="sldImg" idx="2"/>
-          </p:nvPr>
-        </p:nvSpPr>
-        <p:spPr/>
-      </p:sp>
-      <p:sp>
-        <p:nvSpPr>
-          <p:cNvPr id="3" name="Notes Placeholder 2"/>
-          <p:cNvSpPr>
-            <a:spLocks noGrp="1"/>
-          </p:cNvSpPr>
-          <p:nvPr>
-            <p:ph type="body" idx="3" sz="quarter"/>
-          </p:nvPr>
-        </p:nvSpPr>
-        <p:spPr/>
-        <p:txBody>
-          <a:bodyPr/>
-          <a:lstStyle/>
-          <a:p>
-            <a:r>
-              <a:t>Clinical audiences will have lived this. Ask how many alerts they dismissed on their last shift without reading them. The answer makes the argument for you.</a:t>
-            </a:r>
-          </a:p>
-          <a:p/>
-          <a:p>
-            <a:r>
-              <a:t>Both failure modes are design problems. Resist any framing that blames users.</a:t>
-            </a:r>
-          </a:p>
-          <a:p/>
-          <a:p>
-            <a:r>
-              <a:t>About 6 minutes including discussion.</a:t>
-            </a:r>
-          </a:p>
-        </p:txBody>
-      </p:sp>
-      <p:sp>
-        <p:nvSpPr>
-          <p:cNvPr id="4" name="Slide Number Placeholder 3"/>
-          <p:cNvSpPr>
-            <a:spLocks noGrp="1"/>
-          </p:cNvSpPr>
-          <p:nvPr>
-            <p:ph type="sldNum" idx="5" sz="quarter"/>
-          </p:nvPr>
-        </p:nvSpPr>
-        <p:spPr/>
-      </p:sp>
-    </p:spTree>
-  </p:cSld>
-  <p:clrMapOvr>
-    <a:masterClrMapping/>
-  </p:clrMapOvr>
-</p:notes>
-</file>
-
-<file path=ppt/notesSlides/notesSlide4.xml><?xml version="1.0" encoding="utf-8"?>
-<p:notes xmlns:a="http://schemas.openxmlformats.org/drawingml/2006/main" xmlns:p="http://schemas.openxmlformats.org/presentationml/2006/main" xmlns:r="http://schemas.openxmlformats.org/officeDocument/2006/relationships">
-  <p:cSld>
-    <p:spTree>
-      <p:nvGrpSpPr>
-        <p:cNvPr id="1" name=""/>
-        <p:cNvGrpSpPr/>
-        <p:nvPr/>
-      </p:nvGrpSpPr>
-      <p:grpSpPr>
-        <a:xfrm>
-          <a:off x="0" y="0"/>
-          <a:ext cx="0" cy="0"/>
-          <a:chOff x="0" y="0"/>
-          <a:chExt cx="0" cy="0"/>
-        </a:xfrm>
-      </p:grpSpPr>
-      <p:sp>
-        <p:nvSpPr>
-          <p:cNvPr id="2" name="Slide Image Placeholder 1"/>
-          <p:cNvSpPr>
-            <a:spLocks noGrp="1"/>
-          </p:cNvSpPr>
-          <p:nvPr>
-            <p:ph type="sldImg" idx="2"/>
-          </p:nvPr>
-        </p:nvSpPr>
-        <p:spPr/>
-      </p:sp>
-      <p:sp>
-        <p:nvSpPr>
-          <p:cNvPr id="3" name="Notes Placeholder 2"/>
-          <p:cNvSpPr>
-            <a:spLocks noGrp="1"/>
-          </p:cNvSpPr>
-          <p:nvPr>
-            <p:ph type="body" idx="3" sz="quarter"/>
-          </p:nvPr>
-        </p:nvSpPr>
-        <p:spPr/>
-        <p:txBody>
-          <a:bodyPr/>
-          <a:lstStyle/>
-          <a:p>
-            <a:r>
-              <a:t>Thirty seconds, no more. The purpose is to orient anyone who missed the previous session, not to re-teach it.</a:t>
-            </a:r>
-          </a:p>
-        </p:txBody>
-      </p:sp>
-      <p:sp>
-        <p:nvSpPr>
-          <p:cNvPr id="4" name="Slide Number Placeholder 3"/>
-          <p:cNvSpPr>
-            <a:spLocks noGrp="1"/>
-          </p:cNvSpPr>
-          <p:nvPr>
-            <p:ph type="sldNum" idx="5" sz="quarter"/>
-          </p:nvPr>
-        </p:nvSpPr>
-        <p:spPr/>
-      </p:sp>
-    </p:spTree>
-  </p:cSld>
-  <p:clrMapOvr>
-    <a:masterClrMapping/>
-  </p:clrMapOvr>
-</p:notes>
-</file>
-
-<file path=ppt/notesSlides/notesSlide5.xml><?xml version="1.0" encoding="utf-8"?>
-<p:notes xmlns:a="http://schemas.openxmlformats.org/drawingml/2006/main" xmlns:p="http://schemas.openxmlformats.org/presentationml/2006/main" xmlns:r="http://schemas.openxmlformats.org/officeDocument/2006/relationships">
-  <p:cSld>
-    <p:spTree>
-      <p:nvGrpSpPr>
-        <p:cNvPr id="1" name=""/>
-        <p:cNvGrpSpPr/>
-        <p:nvPr/>
-      </p:nvGrpSpPr>
-      <p:grpSpPr>
-        <a:xfrm>
-          <a:off x="0" y="0"/>
-          <a:ext cx="0" cy="0"/>
-          <a:chOff x="0" y="0"/>
-          <a:chExt cx="0" cy="0"/>
-        </a:xfrm>
-      </p:grpSpPr>
-      <p:sp>
-        <p:nvSpPr>
-          <p:cNvPr id="2" name="Slide Image Placeholder 1"/>
-          <p:cNvSpPr>
-            <a:spLocks noGrp="1"/>
-          </p:cNvSpPr>
-          <p:nvPr>
-            <p:ph type="sldImg" idx="2"/>
-          </p:nvPr>
-        </p:nvSpPr>
-        <p:spPr/>
-      </p:sp>
-      <p:sp>
-        <p:nvSpPr>
-          <p:cNvPr id="3" name="Notes Placeholder 2"/>
-          <p:cNvSpPr>
-            <a:spLocks noGrp="1"/>
-          </p:cNvSpPr>
-          <p:nvPr>
-            <p:ph type="body" idx="3" sz="quarter"/>
-          </p:nvPr>
-        </p:nvSpPr>
-        <p:spPr/>
-        <p:txBody>
-          <a:bodyPr/>
-          <a:lstStyle/>
-          <a:p>
-            <a:r>
-              <a:t>Audiences arrive with wildly different assumptions about this, from 'it will replace radiologists' to 'it is a toy'. The two columns are there to reset both.</a:t>
-            </a:r>
-          </a:p>
-          <a:p/>
-          <a:p>
-            <a:r>
-              <a:t>Ambient documentation is the example most likely to be in your own organisation already. Ask whether anyone is using one.</a:t>
-            </a:r>
-          </a:p>
-          <a:p/>
-          <a:p>
-            <a:r>
-              <a:t>About 5 minutes.</a:t>
-            </a:r>
-          </a:p>
-        </p:txBody>
-      </p:sp>
-      <p:sp>
-        <p:nvSpPr>
-          <p:cNvPr id="4" name="Slide Number Placeholder 3"/>
-          <p:cNvSpPr>
-            <a:spLocks noGrp="1"/>
-          </p:cNvSpPr>
-          <p:nvPr>
-            <p:ph type="sldNum" idx="5" sz="quarter"/>
-          </p:nvPr>
-        </p:nvSpPr>
-        <p:spPr/>
-      </p:sp>
-    </p:spTree>
-  </p:cSld>
-  <p:clrMapOvr>
-    <a:masterClrMapping/>
-  </p:clrMapOvr>
-</p:notes>
-</file>
-
-<file path=ppt/notesSlides/notesSlide6.xml><?xml version="1.0" encoding="utf-8"?>
-<p:notes xmlns:a="http://schemas.openxmlformats.org/drawingml/2006/main" xmlns:p="http://schemas.openxmlformats.org/presentationml/2006/main" xmlns:r="http://schemas.openxmlformats.org/officeDocument/2006/relationships">
-  <p:cSld>
-    <p:spTree>
-      <p:nvGrpSpPr>
-        <p:cNvPr id="1" name=""/>
-        <p:cNvGrpSpPr/>
-        <p:nvPr/>
-      </p:nvGrpSpPr>
-      <p:grpSpPr>
-        <a:xfrm>
-          <a:off x="0" y="0"/>
-          <a:ext cx="0" cy="0"/>
-          <a:chOff x="0" y="0"/>
-          <a:chExt cx="0" cy="0"/>
-        </a:xfrm>
-      </p:grpSpPr>
-      <p:sp>
-        <p:nvSpPr>
-          <p:cNvPr id="2" name="Slide Image Placeholder 1"/>
-          <p:cNvSpPr>
-            <a:spLocks noGrp="1"/>
-          </p:cNvSpPr>
-          <p:nvPr>
-            <p:ph type="sldImg" idx="2"/>
-          </p:nvPr>
-        </p:nvSpPr>
-        <p:spPr/>
-      </p:sp>
-      <p:sp>
-        <p:nvSpPr>
-          <p:cNvPr id="3" name="Notes Placeholder 2"/>
-          <p:cNvSpPr>
-            <a:spLocks noGrp="1"/>
-          </p:cNvSpPr>
-          <p:nvPr>
-            <p:ph type="body" idx="3" sz="quarter"/>
-          </p:nvPr>
-        </p:nvSpPr>
-        <p:spPr/>
-        <p:txBody>
-          <a:bodyPr/>
-          <a:lstStyle/>
-          <a:p>
-            <a:r>
-              <a:t>This is the analytical payoff of the previous slide. The distinction is worth stating as a rule they can apply to any proposal that crosses their desk.</a:t>
-            </a:r>
-          </a:p>
-          <a:p/>
-          <a:p>
-            <a:r>
-              <a:t>About 3 minutes.</a:t>
-            </a:r>
-          </a:p>
-        </p:txBody>
-      </p:sp>
-      <p:sp>
-        <p:nvSpPr>
-          <p:cNvPr id="4" name="Slide Number Placeholder 3"/>
-          <p:cNvSpPr>
-            <a:spLocks noGrp="1"/>
-          </p:cNvSpPr>
-          <p:nvPr>
-            <p:ph type="sldNum" idx="5" sz="quarter"/>
-          </p:nvPr>
-        </p:nvSpPr>
-        <p:spPr/>
-      </p:sp>
-    </p:spTree>
-  </p:cSld>
-  <p:clrMapOvr>
-    <a:masterClrMapping/>
-  </p:clrMapOvr>
-</p:notes>
-</file>
-
-<file path=ppt/notesSlides/notesSlide7.xml><?xml version="1.0" encoding="utf-8"?>
-<p:notes xmlns:a="http://schemas.openxmlformats.org/drawingml/2006/main" xmlns:p="http://schemas.openxmlformats.org/presentationml/2006/main" xmlns:r="http://schemas.openxmlformats.org/officeDocument/2006/relationships">
-  <p:cSld>
-    <p:spTree>
-      <p:nvGrpSpPr>
-        <p:cNvPr id="1" name=""/>
-        <p:cNvGrpSpPr/>
-        <p:nvPr/>
-      </p:nvGrpSpPr>
-      <p:grpSpPr>
-        <a:xfrm>
-          <a:off x="0" y="0"/>
-          <a:ext cx="0" cy="0"/>
-          <a:chOff x="0" y="0"/>
-          <a:chExt cx="0" cy="0"/>
-        </a:xfrm>
-      </p:grpSpPr>
-      <p:sp>
-        <p:nvSpPr>
-          <p:cNvPr id="2" name="Slide Image Placeholder 1"/>
-          <p:cNvSpPr>
-            <a:spLocks noGrp="1"/>
-          </p:cNvSpPr>
-          <p:nvPr>
-            <p:ph type="sldImg" idx="2"/>
-          </p:nvPr>
-        </p:nvSpPr>
-        <p:spPr/>
-      </p:sp>
-      <p:sp>
-        <p:nvSpPr>
-          <p:cNvPr id="3" name="Notes Placeholder 2"/>
-          <p:cNvSpPr>
-            <a:spLocks noGrp="1"/>
-          </p:cNvSpPr>
-          <p:nvPr>
-            <p:ph type="body" idx="3" sz="quarter"/>
-          </p:nvPr>
-        </p:nvSpPr>
-        <p:spPr/>
-        <p:txBody>
-          <a:bodyPr/>
-          <a:lstStyle/>
-          <a:p>
-            <a:r>
-              <a:t>Keep this factual and do not give regulatory advice. The goal is that nobody in the room is surprised later to learn their project may be building a medical device.</a:t>
-            </a:r>
-          </a:p>
-          <a:p/>
-          <a:p>
-            <a:r>
-              <a:t>The locked versus continuously learning distinction is the one people have usually never considered, and it has real design consequences.</a:t>
-            </a:r>
-          </a:p>
-          <a:p/>
-          <a:p>
-            <a:r>
-              <a:t>About 5 minutes.</a:t>
-            </a:r>
-          </a:p>
-        </p:txBody>
-      </p:sp>
-      <p:sp>
-        <p:nvSpPr>
-          <p:cNvPr id="4" name="Slide Number Placeholder 3"/>
-          <p:cNvSpPr>
-            <a:spLocks noGrp="1"/>
-          </p:cNvSpPr>
-          <p:nvPr>
-            <p:ph type="sldNum" idx="5" sz="quarter"/>
-          </p:nvPr>
-        </p:nvSpPr>
-        <p:spPr/>
-      </p:sp>
-    </p:spTree>
-  </p:cSld>
-  <p:clrMapOvr>
-    <a:masterClrMapping/>
-  </p:clrMapOvr>
-</p:notes>
-</file>
-
-<file path=ppt/notesSlides/notesSlide8.xml><?xml version="1.0" encoding="utf-8"?>
 <p:notes xmlns:a="http://schemas.openxmlformats.org/drawingml/2006/main" xmlns:r="http://schemas.openxmlformats.org/officeDocument/2006/relationships" xmlns:p="http://schemas.openxmlformats.org/presentationml/2006/main">
   <p:cSld>
     <p:spTree>
@@ -1240,7 +927,7 @@
           <a:p>
             <a:fld id="{0F578B63-BA6E-F541-BDDE-F9290717A250}" type="slidenum">
               <a:rPr lang="en-US" smtClean="0"/>
-              <a:t>82</a:t>
+              <a:t>14</a:t>
             </a:fld>
             <a:endParaRPr lang="en-US"/>
           </a:p>
@@ -1259,7 +946,7 @@
 </p:notes>
 </file>
 
-<file path=ppt/notesSlides/notesSlide9.xml><?xml version="1.0" encoding="utf-8"?>
+<file path=ppt/notesSlides/notesSlide4.xml><?xml version="1.0" encoding="utf-8"?>
 <p:notes xmlns:a="http://schemas.openxmlformats.org/drawingml/2006/main" xmlns:r="http://schemas.openxmlformats.org/officeDocument/2006/relationships" xmlns:p="http://schemas.openxmlformats.org/presentationml/2006/main">
   <p:cSld>
     <p:spTree>
@@ -1348,7 +1035,7 @@
           <a:p>
             <a:fld id="{0F578B63-BA6E-F541-BDDE-F9290717A250}" type="slidenum">
               <a:rPr lang="en-US" smtClean="0"/>
-              <a:t>84</a:t>
+              <a:t>16</a:t>
             </a:fld>
             <a:endParaRPr lang="en-US"/>
           </a:p>
@@ -1360,6 +1047,428 @@
         <p14:creationId xmlns:p14="http://schemas.microsoft.com/office/powerpoint/2010/main" val="2463776111"/>
       </p:ext>
     </p:extLst>
+  </p:cSld>
+  <p:clrMapOvr>
+    <a:masterClrMapping/>
+  </p:clrMapOvr>
+</p:notes>
+</file>
+
+<file path=ppt/notesSlides/notesSlide5.xml><?xml version="1.0" encoding="utf-8"?>
+<p:notes xmlns:a="http://schemas.openxmlformats.org/drawingml/2006/main" xmlns:r="http://schemas.openxmlformats.org/officeDocument/2006/relationships" xmlns:p="http://schemas.openxmlformats.org/presentationml/2006/main">
+  <p:cSld>
+    <p:spTree>
+      <p:nvGrpSpPr>
+        <p:cNvPr id="1" name=""/>
+        <p:cNvGrpSpPr/>
+        <p:nvPr/>
+      </p:nvGrpSpPr>
+      <p:grpSpPr>
+        <a:xfrm>
+          <a:off x="0" y="0"/>
+          <a:ext cx="0" cy="0"/>
+          <a:chOff x="0" y="0"/>
+          <a:chExt cx="0" cy="0"/>
+        </a:xfrm>
+      </p:grpSpPr>
+      <p:sp>
+        <p:nvSpPr>
+          <p:cNvPr id="2" name="Slide Image Placeholder 1"/>
+          <p:cNvSpPr>
+            <a:spLocks noGrp="1" noRot="1" noChangeAspect="1"/>
+          </p:cNvSpPr>
+          <p:nvPr>
+            <p:ph type="sldImg" idx="2"/>
+          </p:nvPr>
+        </p:nvSpPr>
+        <p:spPr/>
+      </p:sp>
+      <p:sp>
+        <p:nvSpPr>
+          <p:cNvPr id="3" name="Notes Placeholder 2"/>
+          <p:cNvSpPr>
+            <a:spLocks noGrp="1"/>
+          </p:cNvSpPr>
+          <p:nvPr>
+            <p:ph type="body" sz="quarter" idx="3"/>
+          </p:nvPr>
+        </p:nvSpPr>
+        <p:spPr/>
+        <p:txBody>
+          <a:bodyPr/>
+          <a:lstStyle/>
+          <a:p>
+            <a:r>
+              <a:t>Audiences arrive with wildly different assumptions about this, from 'it will replace radiologists' to 'it is a toy'. The two columns are there to reset both.</a:t>
+            </a:r>
+          </a:p>
+          <a:p>
+            <a:endParaRPr/>
+          </a:p>
+          <a:p>
+            <a:r>
+              <a:t>Ambient documentation is the example most likely to be in your own organisation already. Ask whether anyone is using one.</a:t>
+            </a:r>
+          </a:p>
+          <a:p>
+            <a:endParaRPr/>
+          </a:p>
+          <a:p>
+            <a:r>
+              <a:t>About 5 minutes.</a:t>
+            </a:r>
+          </a:p>
+        </p:txBody>
+      </p:sp>
+      <p:sp>
+        <p:nvSpPr>
+          <p:cNvPr id="4" name="Slide Number Placeholder 3"/>
+          <p:cNvSpPr>
+            <a:spLocks noGrp="1"/>
+          </p:cNvSpPr>
+          <p:nvPr>
+            <p:ph type="sldNum" sz="quarter" idx="5"/>
+          </p:nvPr>
+        </p:nvSpPr>
+        <p:spPr/>
+      </p:sp>
+    </p:spTree>
+  </p:cSld>
+  <p:clrMapOvr>
+    <a:masterClrMapping/>
+  </p:clrMapOvr>
+</p:notes>
+</file>
+
+<file path=ppt/notesSlides/notesSlide6.xml><?xml version="1.0" encoding="utf-8"?>
+<p:notes xmlns:a="http://schemas.openxmlformats.org/drawingml/2006/main" xmlns:r="http://schemas.openxmlformats.org/officeDocument/2006/relationships" xmlns:p="http://schemas.openxmlformats.org/presentationml/2006/main">
+  <p:cSld>
+    <p:spTree>
+      <p:nvGrpSpPr>
+        <p:cNvPr id="1" name=""/>
+        <p:cNvGrpSpPr/>
+        <p:nvPr/>
+      </p:nvGrpSpPr>
+      <p:grpSpPr>
+        <a:xfrm>
+          <a:off x="0" y="0"/>
+          <a:ext cx="0" cy="0"/>
+          <a:chOff x="0" y="0"/>
+          <a:chExt cx="0" cy="0"/>
+        </a:xfrm>
+      </p:grpSpPr>
+      <p:sp>
+        <p:nvSpPr>
+          <p:cNvPr id="2" name="Slide Image Placeholder 1"/>
+          <p:cNvSpPr>
+            <a:spLocks noGrp="1" noRot="1" noChangeAspect="1"/>
+          </p:cNvSpPr>
+          <p:nvPr>
+            <p:ph type="sldImg" idx="2"/>
+          </p:nvPr>
+        </p:nvSpPr>
+        <p:spPr/>
+      </p:sp>
+      <p:sp>
+        <p:nvSpPr>
+          <p:cNvPr id="3" name="Notes Placeholder 2"/>
+          <p:cNvSpPr>
+            <a:spLocks noGrp="1"/>
+          </p:cNvSpPr>
+          <p:nvPr>
+            <p:ph type="body" sz="quarter" idx="3"/>
+          </p:nvPr>
+        </p:nvSpPr>
+        <p:spPr/>
+        <p:txBody>
+          <a:bodyPr/>
+          <a:lstStyle/>
+          <a:p>
+            <a:r>
+              <a:t>This is the analytical payoff of the previous slide. The distinction is worth stating as a rule they can apply to any proposal that crosses their desk.</a:t>
+            </a:r>
+          </a:p>
+          <a:p>
+            <a:endParaRPr/>
+          </a:p>
+          <a:p>
+            <a:r>
+              <a:t>About 3 minutes.</a:t>
+            </a:r>
+          </a:p>
+        </p:txBody>
+      </p:sp>
+      <p:sp>
+        <p:nvSpPr>
+          <p:cNvPr id="4" name="Slide Number Placeholder 3"/>
+          <p:cNvSpPr>
+            <a:spLocks noGrp="1"/>
+          </p:cNvSpPr>
+          <p:nvPr>
+            <p:ph type="sldNum" sz="quarter" idx="5"/>
+          </p:nvPr>
+        </p:nvSpPr>
+        <p:spPr/>
+      </p:sp>
+    </p:spTree>
+  </p:cSld>
+  <p:clrMapOvr>
+    <a:masterClrMapping/>
+  </p:clrMapOvr>
+</p:notes>
+</file>
+
+<file path=ppt/notesSlides/notesSlide7.xml><?xml version="1.0" encoding="utf-8"?>
+<p:notes xmlns:a="http://schemas.openxmlformats.org/drawingml/2006/main" xmlns:r="http://schemas.openxmlformats.org/officeDocument/2006/relationships" xmlns:p="http://schemas.openxmlformats.org/presentationml/2006/main">
+  <p:cSld>
+    <p:spTree>
+      <p:nvGrpSpPr>
+        <p:cNvPr id="1" name=""/>
+        <p:cNvGrpSpPr/>
+        <p:nvPr/>
+      </p:nvGrpSpPr>
+      <p:grpSpPr>
+        <a:xfrm>
+          <a:off x="0" y="0"/>
+          <a:ext cx="0" cy="0"/>
+          <a:chOff x="0" y="0"/>
+          <a:chExt cx="0" cy="0"/>
+        </a:xfrm>
+      </p:grpSpPr>
+      <p:sp>
+        <p:nvSpPr>
+          <p:cNvPr id="2" name="Slide Image Placeholder 1"/>
+          <p:cNvSpPr>
+            <a:spLocks noGrp="1" noRot="1" noChangeAspect="1"/>
+          </p:cNvSpPr>
+          <p:nvPr>
+            <p:ph type="sldImg" idx="2"/>
+          </p:nvPr>
+        </p:nvSpPr>
+        <p:spPr/>
+      </p:sp>
+      <p:sp>
+        <p:nvSpPr>
+          <p:cNvPr id="3" name="Notes Placeholder 2"/>
+          <p:cNvSpPr>
+            <a:spLocks noGrp="1"/>
+          </p:cNvSpPr>
+          <p:nvPr>
+            <p:ph type="body" sz="quarter" idx="3"/>
+          </p:nvPr>
+        </p:nvSpPr>
+        <p:spPr/>
+        <p:txBody>
+          <a:bodyPr/>
+          <a:lstStyle/>
+          <a:p>
+            <a:r>
+              <a:t>Keep this factual and do not give regulatory advice. The goal is that nobody in the room is surprised later to learn their project may be building a medical device.</a:t>
+            </a:r>
+          </a:p>
+          <a:p>
+            <a:endParaRPr/>
+          </a:p>
+          <a:p>
+            <a:r>
+              <a:t>The locked versus continuously learning distinction is the one people have usually never considered, and it has real design consequences.</a:t>
+            </a:r>
+          </a:p>
+          <a:p>
+            <a:endParaRPr/>
+          </a:p>
+          <a:p>
+            <a:r>
+              <a:t>About 5 minutes.</a:t>
+            </a:r>
+          </a:p>
+        </p:txBody>
+      </p:sp>
+      <p:sp>
+        <p:nvSpPr>
+          <p:cNvPr id="4" name="Slide Number Placeholder 3"/>
+          <p:cNvSpPr>
+            <a:spLocks noGrp="1"/>
+          </p:cNvSpPr>
+          <p:nvPr>
+            <p:ph type="sldNum" sz="quarter" idx="5"/>
+          </p:nvPr>
+        </p:nvSpPr>
+        <p:spPr/>
+      </p:sp>
+    </p:spTree>
+  </p:cSld>
+  <p:clrMapOvr>
+    <a:masterClrMapping/>
+  </p:clrMapOvr>
+</p:notes>
+</file>
+
+<file path=ppt/notesSlides/notesSlide8.xml><?xml version="1.0" encoding="utf-8"?>
+<p:notes xmlns:a="http://schemas.openxmlformats.org/drawingml/2006/main" xmlns:r="http://schemas.openxmlformats.org/officeDocument/2006/relationships" xmlns:p="http://schemas.openxmlformats.org/presentationml/2006/main">
+  <p:cSld>
+    <p:spTree>
+      <p:nvGrpSpPr>
+        <p:cNvPr id="1" name=""/>
+        <p:cNvGrpSpPr/>
+        <p:nvPr/>
+      </p:nvGrpSpPr>
+      <p:grpSpPr>
+        <a:xfrm>
+          <a:off x="0" y="0"/>
+          <a:ext cx="0" cy="0"/>
+          <a:chOff x="0" y="0"/>
+          <a:chExt cx="0" cy="0"/>
+        </a:xfrm>
+      </p:grpSpPr>
+      <p:sp>
+        <p:nvSpPr>
+          <p:cNvPr id="2" name="Slide Image Placeholder 1"/>
+          <p:cNvSpPr>
+            <a:spLocks noGrp="1" noRot="1" noChangeAspect="1"/>
+          </p:cNvSpPr>
+          <p:nvPr>
+            <p:ph type="sldImg" idx="2"/>
+          </p:nvPr>
+        </p:nvSpPr>
+        <p:spPr/>
+      </p:sp>
+      <p:sp>
+        <p:nvSpPr>
+          <p:cNvPr id="3" name="Notes Placeholder 2"/>
+          <p:cNvSpPr>
+            <a:spLocks noGrp="1"/>
+          </p:cNvSpPr>
+          <p:nvPr>
+            <p:ph type="body" sz="quarter" idx="3"/>
+          </p:nvPr>
+        </p:nvSpPr>
+        <p:spPr/>
+        <p:txBody>
+          <a:bodyPr/>
+          <a:lstStyle/>
+          <a:p>
+            <a:r>
+              <a:t>Clinical audiences will have lived this. Ask how many alerts they dismissed on their last shift without reading them. The answer makes the argument for you.</a:t>
+            </a:r>
+          </a:p>
+          <a:p>
+            <a:endParaRPr/>
+          </a:p>
+          <a:p>
+            <a:r>
+              <a:t>Both failure modes are design problems. Resist any framing that blames users.</a:t>
+            </a:r>
+          </a:p>
+          <a:p>
+            <a:endParaRPr/>
+          </a:p>
+          <a:p>
+            <a:r>
+              <a:t>About 6 minutes including discussion.</a:t>
+            </a:r>
+          </a:p>
+        </p:txBody>
+      </p:sp>
+      <p:sp>
+        <p:nvSpPr>
+          <p:cNvPr id="4" name="Slide Number Placeholder 3"/>
+          <p:cNvSpPr>
+            <a:spLocks noGrp="1"/>
+          </p:cNvSpPr>
+          <p:nvPr>
+            <p:ph type="sldNum" sz="quarter" idx="5"/>
+          </p:nvPr>
+        </p:nvSpPr>
+        <p:spPr/>
+      </p:sp>
+    </p:spTree>
+  </p:cSld>
+  <p:clrMapOvr>
+    <a:masterClrMapping/>
+  </p:clrMapOvr>
+</p:notes>
+</file>
+
+<file path=ppt/notesSlides/notesSlide9.xml><?xml version="1.0" encoding="utf-8"?>
+<p:notes xmlns:a="http://schemas.openxmlformats.org/drawingml/2006/main" xmlns:r="http://schemas.openxmlformats.org/officeDocument/2006/relationships" xmlns:p="http://schemas.openxmlformats.org/presentationml/2006/main">
+  <p:cSld>
+    <p:spTree>
+      <p:nvGrpSpPr>
+        <p:cNvPr id="1" name=""/>
+        <p:cNvGrpSpPr/>
+        <p:nvPr/>
+      </p:nvGrpSpPr>
+      <p:grpSpPr>
+        <a:xfrm>
+          <a:off x="0" y="0"/>
+          <a:ext cx="0" cy="0"/>
+          <a:chOff x="0" y="0"/>
+          <a:chExt cx="0" cy="0"/>
+        </a:xfrm>
+      </p:grpSpPr>
+      <p:sp>
+        <p:nvSpPr>
+          <p:cNvPr id="2" name="Slide Image Placeholder 1"/>
+          <p:cNvSpPr>
+            <a:spLocks noGrp="1" noRot="1" noChangeAspect="1"/>
+          </p:cNvSpPr>
+          <p:nvPr>
+            <p:ph type="sldImg" idx="2"/>
+          </p:nvPr>
+        </p:nvSpPr>
+        <p:spPr/>
+      </p:sp>
+      <p:sp>
+        <p:nvSpPr>
+          <p:cNvPr id="3" name="Notes Placeholder 2"/>
+          <p:cNvSpPr>
+            <a:spLocks noGrp="1"/>
+          </p:cNvSpPr>
+          <p:nvPr>
+            <p:ph type="body" sz="quarter" idx="3"/>
+          </p:nvPr>
+        </p:nvSpPr>
+        <p:spPr/>
+        <p:txBody>
+          <a:bodyPr/>
+          <a:lstStyle/>
+          <a:p>
+            <a:r>
+              <a:t>Offer this as something to take away rather than something to read aloud. Walk the two column headings and stop.</a:t>
+            </a:r>
+          </a:p>
+          <a:p>
+            <a:endParaRPr/>
+          </a:p>
+          <a:p>
+            <a:r>
+              <a:t>The item people skip is the last one on the right. Deciding regulatory status late is expensive.</a:t>
+            </a:r>
+          </a:p>
+          <a:p>
+            <a:endParaRPr/>
+          </a:p>
+          <a:p>
+            <a:r>
+              <a:t>About 3 minutes.</a:t>
+            </a:r>
+          </a:p>
+        </p:txBody>
+      </p:sp>
+      <p:sp>
+        <p:nvSpPr>
+          <p:cNvPr id="4" name="Slide Number Placeholder 3"/>
+          <p:cNvSpPr>
+            <a:spLocks noGrp="1"/>
+          </p:cNvSpPr>
+          <p:nvPr>
+            <p:ph type="sldNum" sz="quarter" idx="5"/>
+          </p:nvPr>
+        </p:nvSpPr>
+        <p:spPr/>
+      </p:sp>
+    </p:spTree>
   </p:cSld>
   <p:clrMapOvr>
     <a:masterClrMapping/>
@@ -1606,7 +1715,7 @@
             <a:fld id="{5586B75A-687E-405C-8A0B-8D00578BA2C3}" type="datetimeFigureOut">
               <a:rPr lang="en-US" dirty="0"/>
               <a:pPr/>
-              <a:t>3/11/26</a:t>
+              <a:t>10/3/26</a:t>
             </a:fld>
             <a:endParaRPr lang="en-US" dirty="0"/>
           </a:p>
@@ -1773,7 +1882,7 @@
             <a:fld id="{5586B75A-687E-405C-8A0B-8D00578BA2C3}" type="datetimeFigureOut">
               <a:rPr lang="en-US" dirty="0"/>
               <a:pPr/>
-              <a:t>3/11/26</a:t>
+              <a:t>10/3/26</a:t>
             </a:fld>
             <a:endParaRPr lang="en-US" dirty="0"/>
           </a:p>
@@ -1950,7 +2059,7 @@
             <a:fld id="{5586B75A-687E-405C-8A0B-8D00578BA2C3}" type="datetimeFigureOut">
               <a:rPr lang="en-US" dirty="0"/>
               <a:pPr/>
-              <a:t>3/11/26</a:t>
+              <a:t>10/3/26</a:t>
             </a:fld>
             <a:endParaRPr lang="en-US" dirty="0"/>
           </a:p>
@@ -2117,7 +2226,7 @@
             <a:fld id="{5586B75A-687E-405C-8A0B-8D00578BA2C3}" type="datetimeFigureOut">
               <a:rPr lang="en-US" dirty="0"/>
               <a:pPr/>
-              <a:t>3/11/26</a:t>
+              <a:t>10/3/26</a:t>
             </a:fld>
             <a:endParaRPr lang="en-US" dirty="0"/>
           </a:p>
@@ -2372,7 +2481,7 @@
             <a:fld id="{5586B75A-687E-405C-8A0B-8D00578BA2C3}" type="datetimeFigureOut">
               <a:rPr lang="en-US" dirty="0"/>
               <a:pPr/>
-              <a:t>3/11/26</a:t>
+              <a:t>10/3/26</a:t>
             </a:fld>
             <a:endParaRPr lang="en-US" dirty="0"/>
           </a:p>
@@ -2657,7 +2766,7 @@
             <a:fld id="{5586B75A-687E-405C-8A0B-8D00578BA2C3}" type="datetimeFigureOut">
               <a:rPr lang="en-US" dirty="0"/>
               <a:pPr/>
-              <a:t>3/11/26</a:t>
+              <a:t>10/3/26</a:t>
             </a:fld>
             <a:endParaRPr lang="en-US" dirty="0"/>
           </a:p>
@@ -3096,7 +3205,7 @@
             <a:fld id="{5586B75A-687E-405C-8A0B-8D00578BA2C3}" type="datetimeFigureOut">
               <a:rPr lang="en-US" dirty="0"/>
               <a:pPr/>
-              <a:t>3/11/26</a:t>
+              <a:t>10/3/26</a:t>
             </a:fld>
             <a:endParaRPr lang="en-US" dirty="0"/>
           </a:p>
@@ -3211,7 +3320,7 @@
             <a:fld id="{5586B75A-687E-405C-8A0B-8D00578BA2C3}" type="datetimeFigureOut">
               <a:rPr lang="en-US" dirty="0"/>
               <a:pPr/>
-              <a:t>3/11/26</a:t>
+              <a:t>10/3/26</a:t>
             </a:fld>
             <a:endParaRPr lang="en-US" dirty="0"/>
           </a:p>
@@ -3303,7 +3412,7 @@
             <a:fld id="{5586B75A-687E-405C-8A0B-8D00578BA2C3}" type="datetimeFigureOut">
               <a:rPr lang="en-US" dirty="0"/>
               <a:pPr/>
-              <a:t>3/11/26</a:t>
+              <a:t>10/3/26</a:t>
             </a:fld>
             <a:endParaRPr lang="en-US" dirty="0"/>
           </a:p>
@@ -3588,7 +3697,7 @@
             <a:fld id="{5586B75A-687E-405C-8A0B-8D00578BA2C3}" type="datetimeFigureOut">
               <a:rPr lang="en-US" dirty="0"/>
               <a:pPr/>
-              <a:t>3/11/26</a:t>
+              <a:t>10/3/26</a:t>
             </a:fld>
             <a:endParaRPr lang="en-US" dirty="0"/>
           </a:p>
@@ -3858,7 +3967,7 @@
             <a:fld id="{5586B75A-687E-405C-8A0B-8D00578BA2C3}" type="datetimeFigureOut">
               <a:rPr lang="en-US" dirty="0"/>
               <a:pPr/>
-              <a:t>3/11/26</a:t>
+              <a:t>10/3/26</a:t>
             </a:fld>
             <a:endParaRPr lang="en-US" dirty="0"/>
           </a:p>
@@ -4165,7 +4274,7 @@
             <a:fld id="{5586B75A-687E-405C-8A0B-8D00578BA2C3}" type="datetimeFigureOut">
               <a:rPr lang="en-US" smtClean="0"/>
               <a:pPr/>
-              <a:t>3/11/26</a:t>
+              <a:t>10/3/26</a:t>
             </a:fld>
             <a:endParaRPr lang="en-US" dirty="0"/>
           </a:p>
@@ -4687,6 +4796,7 @@
           <a:lstStyle/>
           <a:p>
             <a:pPr algn="ctr"/>
+            <a:endParaRPr/>
           </a:p>
         </p:txBody>
       </p:sp>
@@ -4731,6 +4841,7 @@
           <a:lstStyle/>
           <a:p>
             <a:pPr algn="ctr"/>
+            <a:endParaRPr/>
           </a:p>
         </p:txBody>
       </p:sp>
@@ -4780,86 +4891,6 @@
                 <a:latin typeface="Calibri"/>
               </a:rPr>
               <a:t>Session 3 of 4 — Deep Learning and Generative AI</a:t>
-            </a:r>
-          </a:p>
-        </p:txBody>
-      </p:sp>
-      <p:sp>
-        <p:nvSpPr>
-          <p:cNvPr id="5" name="TextBox 4"/>
-          <p:cNvSpPr txBox="1"/>
-          <p:nvPr/>
-        </p:nvSpPr>
-        <p:spPr>
-          <a:xfrm>
-            <a:off x="822960" y="6263640"/>
-            <a:ext cx="9265920" cy="457200"/>
-          </a:xfrm>
-          <a:prstGeom prst="rect">
-            <a:avLst/>
-          </a:prstGeom>
-          <a:noFill/>
-        </p:spPr>
-        <p:txBody>
-          <a:bodyPr wrap="square">
-            <a:spAutoFit/>
-          </a:bodyPr>
-          <a:lstStyle/>
-          <a:p>
-            <a:r>
-              <a:rPr sz="1200">
-                <a:solidFill>
-                  <a:srgbClr val="EDF1F2"/>
-                </a:solidFill>
-                <a:latin typeface="Calibri"/>
-              </a:rPr>
-              <a:t>March 13, 2026</a:t>
-            </a:r>
-          </a:p>
-          <a:p>
-            <a:r>
-              <a:rPr sz="1200">
-                <a:solidFill>
-                  <a:srgbClr val="EDF1F2"/>
-                </a:solidFill>
-                <a:latin typeface="Calibri"/>
-              </a:rPr>
-              <a:t>Vancouver Marriott Pinnacle Downtown Hotel</a:t>
-            </a:r>
-          </a:p>
-        </p:txBody>
-      </p:sp>
-      <p:sp>
-        <p:nvSpPr>
-          <p:cNvPr id="6" name="TextBox 5"/>
-          <p:cNvSpPr txBox="1"/>
-          <p:nvPr/>
-        </p:nvSpPr>
-        <p:spPr>
-          <a:xfrm>
-            <a:off x="9814560" y="6263640"/>
-            <a:ext cx="1828800" cy="365760"/>
-          </a:xfrm>
-          <a:prstGeom prst="rect">
-            <a:avLst/>
-          </a:prstGeom>
-          <a:noFill/>
-        </p:spPr>
-        <p:txBody>
-          <a:bodyPr wrap="none">
-            <a:spAutoFit/>
-          </a:bodyPr>
-          <a:lstStyle/>
-          <a:p>
-            <a:pPr algn="r"/>
-            <a:r>
-              <a:rPr sz="1200" b="1">
-                <a:solidFill>
-                  <a:srgbClr val="FFFFFF"/>
-                </a:solidFill>
-                <a:latin typeface="Calibri"/>
-              </a:rPr>
-              <a:t>cair.ca</a:t>
             </a:r>
           </a:p>
         </p:txBody>
@@ -9790,7 +9821,7 @@
           <p:nvPr/>
         </p:nvPicPr>
         <p:blipFill>
-          <a:blip r:embed="rId4"/>
+          <a:blip r:embed="rId3"/>
           <a:srcRect l="7063" t="13972" r="4751" b="6282"/>
           <a:stretch>
             <a:fillRect/>
@@ -9821,7 +9852,7 @@
           <p:nvPr/>
         </p:nvPicPr>
         <p:blipFill>
-          <a:blip r:embed="rId5"/>
+          <a:blip r:embed="rId4"/>
           <a:stretch>
             <a:fillRect/>
           </a:stretch>
@@ -9851,7 +9882,7 @@
           <p:nvPr/>
         </p:nvPicPr>
         <p:blipFill>
-          <a:blip r:embed="rId6"/>
+          <a:blip r:embed="rId5"/>
           <a:stretch>
             <a:fillRect/>
           </a:stretch>
@@ -14456,7 +14487,7 @@
 </file>
 
 <file path=ppt/slides/slide2.xml><?xml version="1.0" encoding="utf-8"?>
-<p:sld xmlns:a="http://schemas.openxmlformats.org/drawingml/2006/main" xmlns:p="http://schemas.openxmlformats.org/presentationml/2006/main" xmlns:r="http://schemas.openxmlformats.org/officeDocument/2006/relationships">
+<p:sld xmlns:a="http://schemas.openxmlformats.org/drawingml/2006/main" xmlns:r="http://schemas.openxmlformats.org/officeDocument/2006/relationships" xmlns:p="http://schemas.openxmlformats.org/presentationml/2006/main">
   <p:cSld>
     <p:spTree>
       <p:nvGrpSpPr>
@@ -14464,7 +14495,14 @@
         <p:cNvGrpSpPr/>
         <p:nvPr/>
       </p:nvGrpSpPr>
-      <p:grpSpPr/>
+      <p:grpSpPr>
+        <a:xfrm>
+          <a:off x="0" y="0"/>
+          <a:ext cx="0" cy="0"/>
+          <a:chOff x="0" y="0"/>
+          <a:chExt cx="0" cy="0"/>
+        </a:xfrm>
+      </p:grpSpPr>
       <p:sp>
         <p:nvSpPr>
           <p:cNvPr id="2" name="Title 1"/>
@@ -14501,22 +14539,19 @@
           <a:bodyPr/>
           <a:lstStyle/>
           <a:p>
-            <a:pPr/>
             <a:r>
               <a:t>Session 1: what a model is, and how training works.</a:t>
             </a:r>
           </a:p>
           <a:p>
-            <a:pPr/>
             <a:r>
               <a:t>Session 2: the classical model families, the data they need, and how to judge them.</a:t>
             </a:r>
           </a:p>
           <a:p>
-            <a:pPr/>
-          </a:p>
-          <a:p>
-            <a:pPr/>
+            <a:endParaRPr/>
+          </a:p>
+          <a:p>
             <a:r>
               <a:t>Today:</a:t>
             </a:r>
@@ -14540,10 +14575,9 @@
             </a:r>
           </a:p>
           <a:p>
-            <a:pPr/>
-          </a:p>
-          <a:p>
-            <a:pPr/>
+            <a:endParaRPr/>
+          </a:p>
+          <a:p>
             <a:r>
               <a:t>The last part is the shortest in slides and the longest in calendar time.</a:t>
             </a:r>
@@ -14559,7 +14593,7 @@
 </file>
 
 <file path=ppt/slides/slide20.xml><?xml version="1.0" encoding="utf-8"?>
-<p:sld xmlns:a="http://schemas.openxmlformats.org/drawingml/2006/main" xmlns:p="http://schemas.openxmlformats.org/presentationml/2006/main" xmlns:r="http://schemas.openxmlformats.org/officeDocument/2006/relationships">
+<p:sld xmlns:a="http://schemas.openxmlformats.org/drawingml/2006/main" xmlns:r="http://schemas.openxmlformats.org/officeDocument/2006/relationships" xmlns:p="http://schemas.openxmlformats.org/presentationml/2006/main">
   <p:cSld>
     <p:spTree>
       <p:nvGrpSpPr>
@@ -14567,7 +14601,14 @@
         <p:cNvGrpSpPr/>
         <p:nvPr/>
       </p:nvGrpSpPr>
-      <p:grpSpPr/>
+      <p:grpSpPr>
+        <a:xfrm>
+          <a:off x="0" y="0"/>
+          <a:ext cx="0" cy="0"/>
+          <a:chOff x="0" y="0"/>
+          <a:chExt cx="0" cy="0"/>
+        </a:xfrm>
+      </p:grpSpPr>
       <p:sp>
         <p:nvSpPr>
           <p:cNvPr id="2" name="Title 1"/>
@@ -14599,12 +14640,18 @@
             <p:ph type="body" idx="1"/>
           </p:nvPr>
         </p:nvSpPr>
-        <p:spPr/>
+        <p:spPr>
+          <a:xfrm>
+            <a:off x="3867912" y="499844"/>
+            <a:ext cx="3474720" cy="807720"/>
+          </a:xfrm>
+        </p:spPr>
         <p:txBody>
           <a:bodyPr/>
           <a:lstStyle/>
           <a:p>
             <a:r>
+              <a:rPr dirty="0"/>
               <a:t>Working today</a:t>
             </a:r>
           </a:p>
@@ -14617,7 +14664,7 @@
             <a:spLocks noGrp="1"/>
           </p:cNvSpPr>
           <p:nvPr>
-            <p:ph idx="2" sz="half"/>
+            <p:ph sz="half" idx="2"/>
           </p:nvPr>
         </p:nvSpPr>
         <p:spPr/>
@@ -14625,32 +14672,36 @@
           <a:bodyPr/>
           <a:lstStyle/>
           <a:p>
-            <a:pPr/>
-            <a:r>
+            <a:r>
+              <a:rPr dirty="0"/>
               <a:t>Ambient documentation: drafting the note from the consultation, clinician edits and signs</a:t>
             </a:r>
           </a:p>
           <a:p>
-            <a:pPr/>
-            <a:r>
+            <a:r>
+              <a:rPr dirty="0"/>
               <a:t>Drafting replies to patient portal messages for review</a:t>
             </a:r>
           </a:p>
           <a:p>
-            <a:pPr/>
-            <a:r>
+            <a:r>
+              <a:rPr dirty="0"/>
               <a:t>Coding and billing support</a:t>
             </a:r>
           </a:p>
           <a:p>
-            <a:pPr/>
-            <a:r>
-              <a:t>Summarising a long record for handover</a:t>
-            </a:r>
-          </a:p>
-          <a:p>
-            <a:pPr/>
-            <a:r>
+            <a:r>
+              <a:rPr dirty="0" err="1"/>
+              <a:t>Summarising</a:t>
+            </a:r>
+            <a:r>
+              <a:rPr dirty="0"/>
+              <a:t> a long record for handover</a:t>
+            </a:r>
+          </a:p>
+          <a:p>
+            <a:r>
+              <a:rPr dirty="0"/>
               <a:t>Literature search and synthesis</a:t>
             </a:r>
           </a:p>
@@ -14663,15 +14714,21 @@
             <a:spLocks noGrp="1"/>
           </p:cNvSpPr>
           <p:nvPr>
-            <p:ph type="body" idx="3" sz="quarter"/>
+            <p:ph type="body" sz="quarter" idx="3"/>
           </p:nvPr>
         </p:nvSpPr>
-        <p:spPr/>
+        <p:spPr>
+          <a:xfrm>
+            <a:off x="7818463" y="717251"/>
+            <a:ext cx="3474720" cy="813171"/>
+          </a:xfrm>
+        </p:spPr>
         <p:txBody>
           <a:bodyPr/>
           <a:lstStyle/>
           <a:p>
             <a:r>
+              <a:rPr dirty="0"/>
               <a:t>Not ready, or needs great care</a:t>
             </a:r>
           </a:p>
@@ -14684,7 +14741,7 @@
             <a:spLocks noGrp="1"/>
           </p:cNvSpPr>
           <p:nvPr>
-            <p:ph idx="4" sz="quarter"/>
+            <p:ph sz="quarter" idx="4"/>
           </p:nvPr>
         </p:nvSpPr>
         <p:spPr/>
@@ -14692,31 +14749,26 @@
           <a:bodyPr/>
           <a:lstStyle/>
           <a:p>
-            <a:pPr/>
             <a:r>
               <a:t>Autonomous diagnosis or triage</a:t>
             </a:r>
           </a:p>
           <a:p>
-            <a:pPr/>
             <a:r>
               <a:t>Any output acted on without review</a:t>
             </a:r>
           </a:p>
           <a:p>
-            <a:pPr/>
             <a:r>
               <a:t>Treating the record as fact rather than as text somebody wrote</a:t>
             </a:r>
           </a:p>
           <a:p>
-            <a:pPr/>
             <a:r>
               <a:t>Patient-facing advice with no clinician in the loop</a:t>
             </a:r>
           </a:p>
           <a:p>
-            <a:pPr/>
             <a:r>
               <a:t>Anything where being confidently wrong is not immediately visible</a:t>
             </a:r>
@@ -14732,7 +14784,7 @@
 </file>
 
 <file path=ppt/slides/slide21.xml><?xml version="1.0" encoding="utf-8"?>
-<p:sld xmlns:a="http://schemas.openxmlformats.org/drawingml/2006/main" xmlns:p="http://schemas.openxmlformats.org/presentationml/2006/main" xmlns:r="http://schemas.openxmlformats.org/officeDocument/2006/relationships">
+<p:sld xmlns:a="http://schemas.openxmlformats.org/drawingml/2006/main" xmlns:r="http://schemas.openxmlformats.org/officeDocument/2006/relationships" xmlns:p="http://schemas.openxmlformats.org/presentationml/2006/main">
   <p:cSld>
     <p:spTree>
       <p:nvGrpSpPr>
@@ -14740,7 +14792,14 @@
         <p:cNvGrpSpPr/>
         <p:nvPr/>
       </p:nvGrpSpPr>
-      <p:grpSpPr/>
+      <p:grpSpPr>
+        <a:xfrm>
+          <a:off x="0" y="0"/>
+          <a:ext cx="0" cy="0"/>
+          <a:chOff x="0" y="0"/>
+          <a:chExt cx="0" cy="0"/>
+        </a:xfrm>
+      </p:grpSpPr>
       <p:sp>
         <p:nvSpPr>
           <p:cNvPr id="2" name="Title 1"/>
@@ -14777,40 +14836,35 @@
           <a:bodyPr/>
           <a:lstStyle/>
           <a:p>
-            <a:pPr/>
             <a:r>
               <a:t>Look at what succeeds and what does not, and one distinction does most of the work:</a:t>
             </a:r>
           </a:p>
           <a:p>
-            <a:pPr/>
-          </a:p>
-          <a:p>
-            <a:pPr/>
+            <a:endParaRPr/>
+          </a:p>
+          <a:p>
             <a:r>
               <a:t>A human reviews every output, and the cost of an error is a correction rather than harm.</a:t>
             </a:r>
           </a:p>
           <a:p>
-            <a:pPr/>
-          </a:p>
-          <a:p>
-            <a:pPr/>
+            <a:endParaRPr/>
+          </a:p>
+          <a:p>
             <a:r>
               <a:t>Ambient documentation works because the clinician reads and signs the note. The model saves typing, not judgement.</a:t>
             </a:r>
           </a:p>
           <a:p>
-            <a:pPr/>
             <a:r>
               <a:t>Autonomous triage fails the same test. Nobody sees the error until it has already reached the patient.</a:t>
             </a:r>
           </a:p>
           <a:p>
-            <a:pPr/>
-          </a:p>
-          <a:p>
-            <a:pPr/>
+            <a:endParaRPr/>
+          </a:p>
+          <a:p>
             <a:r>
               <a:t>When assessing any proposed use, ask: who reads this before it matters, and what happens when it is wrong?</a:t>
             </a:r>
@@ -16700,10 +16754,10 @@
       </p:grpSpPr>
       <p:sp>
         <p:nvSpPr>
-          <p:cNvPr id="5" name="Title 4">
+          <p:cNvPr id="2" name="Title 1">
             <a:extLst>
               <a:ext uri="{FF2B5EF4-FFF2-40B4-BE49-F238E27FC236}">
-                <a16:creationId xmlns:a16="http://schemas.microsoft.com/office/drawing/2014/main" id="{08ED3FD2-7935-189F-5542-4DFA309351A2}"/>
+                <a16:creationId xmlns:a16="http://schemas.microsoft.com/office/drawing/2014/main" id="{CF2E5586-1115-CA23-ACEB-5110DBEA7C1B}"/>
               </a:ext>
             </a:extLst>
           </p:cNvPr>
@@ -16722,46 +16776,78 @@
           <a:lstStyle/>
           <a:p>
             <a:r>
-              <a:rPr lang="en-US" sz="3200" b="1" dirty="0"/>
-              <a:t>HL7 FHIR (Health Level 7 Fast Healthcare Interoperability Resources)</a:t>
+              <a:rPr lang="en-US" sz="3200" b="1" dirty="0">
+                <a:cs typeface="Poppins" pitchFamily="2" charset="77"/>
+              </a:rPr>
+              <a:t>Explainability</a:t>
             </a:r>
           </a:p>
         </p:txBody>
       </p:sp>
-      <p:pic>
-        <p:nvPicPr>
-          <p:cNvPr id="3" name="Picture 2">
+      <p:sp>
+        <p:nvSpPr>
+          <p:cNvPr id="3" name="Content Placeholder 2">
             <a:extLst>
               <a:ext uri="{FF2B5EF4-FFF2-40B4-BE49-F238E27FC236}">
-                <a16:creationId xmlns:a16="http://schemas.microsoft.com/office/drawing/2014/main" id="{028513EF-2DB8-A2FB-7769-6C2277F2B6DA}"/>
+                <a16:creationId xmlns:a16="http://schemas.microsoft.com/office/drawing/2014/main" id="{D86CBB4A-EE3E-ED44-2256-BEF41E426FE4}"/>
               </a:ext>
             </a:extLst>
           </p:cNvPr>
-          <p:cNvPicPr>
-            <a:picLocks noChangeAspect="1"/>
-          </p:cNvPicPr>
-          <p:nvPr/>
-        </p:nvPicPr>
-        <p:blipFill>
-          <a:blip r:embed="rId2"/>
-          <a:stretch>
-            <a:fillRect/>
-          </a:stretch>
-        </p:blipFill>
-        <p:spPr>
-          <a:xfrm>
-            <a:off x="3452488" y="765175"/>
-            <a:ext cx="8486593" cy="5327649"/>
-          </a:xfrm>
-          <a:prstGeom prst="rect">
-            <a:avLst/>
-          </a:prstGeom>
-        </p:spPr>
-      </p:pic>
+          <p:cNvSpPr>
+            <a:spLocks noGrp="1"/>
+          </p:cNvSpPr>
+          <p:nvPr>
+            <p:ph idx="1"/>
+          </p:nvPr>
+        </p:nvSpPr>
+        <p:spPr/>
+        <p:txBody>
+          <a:bodyPr>
+            <a:normAutofit fontScale="92500" lnSpcReduction="20000"/>
+          </a:bodyPr>
+          <a:lstStyle/>
+          <a:p>
+            <a:r>
+              <a:rPr lang="en-CA" dirty="0"/>
+              <a:t>Because of the complexity of many machine learning models, it is not possible to explain why they produce the output that they do other than to say it is based on the patterns they learned in the training data. </a:t>
+            </a:r>
+          </a:p>
+          <a:p>
+            <a:r>
+              <a:rPr lang="en-CA" dirty="0"/>
+              <a:t>This is an inherent weakness in establishing trustworthiness and credibility of many machine learning models. </a:t>
+            </a:r>
+          </a:p>
+          <a:p>
+            <a:r>
+              <a:rPr lang="en-CA" dirty="0"/>
+              <a:t>As stated earlier we turn to machine learning when we have examples, but we don’t know how to obtain the behavior we need using explicit instructions. </a:t>
+            </a:r>
+          </a:p>
+          <a:p>
+            <a:r>
+              <a:rPr lang="en-CA" dirty="0"/>
+              <a:t>We instead use the examples to train (adjust the parameters of) a model that  is then able to perform the desired behavior. </a:t>
+            </a:r>
+          </a:p>
+          <a:p>
+            <a:r>
+              <a:rPr lang="en-CA" dirty="0"/>
+              <a:t>In some cases of relatively simple models with few parameters (ex. Linear regression) we can interpret the meaning of the parameter values. </a:t>
+            </a:r>
+          </a:p>
+          <a:p>
+            <a:r>
+              <a:rPr lang="en-CA" dirty="0"/>
+              <a:t>But in general, for most models such as deep neural networks, we cannot explain model behavior based on parameter values.</a:t>
+            </a:r>
+          </a:p>
+        </p:txBody>
+      </p:sp>
     </p:spTree>
     <p:extLst>
       <p:ext uri="{BB962C8B-B14F-4D97-AF65-F5344CB8AC3E}">
-        <p14:creationId xmlns:p14="http://schemas.microsoft.com/office/powerpoint/2010/main" val="3299368034"/>
+        <p14:creationId xmlns:p14="http://schemas.microsoft.com/office/powerpoint/2010/main" val="197764355"/>
       </p:ext>
     </p:extLst>
   </p:cSld>
@@ -16790,92 +16876,117 @@
       </p:grpSpPr>
       <p:sp>
         <p:nvSpPr>
-          <p:cNvPr id="2" name="Title 1">
+          <p:cNvPr id="3" name="TextBox 2">
             <a:extLst>
               <a:ext uri="{FF2B5EF4-FFF2-40B4-BE49-F238E27FC236}">
-                <a16:creationId xmlns:a16="http://schemas.microsoft.com/office/drawing/2014/main" id="{CF2E5586-1115-CA23-ACEB-5110DBEA7C1B}"/>
+                <a16:creationId xmlns:a16="http://schemas.microsoft.com/office/drawing/2014/main" id="{2D36A175-458E-7256-BCDD-E9530E29E106}"/>
               </a:ext>
             </a:extLst>
           </p:cNvPr>
-          <p:cNvSpPr>
-            <a:spLocks noGrp="1"/>
-          </p:cNvSpPr>
-          <p:nvPr>
-            <p:ph type="title"/>
-          </p:nvPr>
+          <p:cNvSpPr txBox="1"/>
+          <p:nvPr/>
         </p:nvSpPr>
-        <p:spPr/>
+        <p:spPr>
+          <a:xfrm>
+            <a:off x="246491" y="318052"/>
+            <a:ext cx="7609398" cy="338554"/>
+          </a:xfrm>
+          <a:prstGeom prst="rect">
+            <a:avLst/>
+          </a:prstGeom>
+          <a:noFill/>
+        </p:spPr>
         <p:txBody>
-          <a:bodyPr>
-            <a:normAutofit/>
+          <a:bodyPr wrap="square" rtlCol="0">
+            <a:spAutoFit/>
           </a:bodyPr>
           <a:lstStyle/>
           <a:p>
             <a:r>
-              <a:rPr lang="en-US" sz="3200" b="1" dirty="0">
+              <a:rPr lang="en-US" sz="1600" b="1" dirty="0">
+                <a:solidFill>
+                  <a:schemeClr val="bg1"/>
+                </a:solidFill>
+                <a:latin typeface="Poppins" pitchFamily="2" charset="77"/>
                 <a:cs typeface="Poppins" pitchFamily="2" charset="77"/>
               </a:rPr>
-              <a:t>Explainability</a:t>
+              <a:t>Explainability – </a:t>
+            </a:r>
+            <a:r>
+              <a:rPr lang="en-US" sz="1600" dirty="0">
+                <a:solidFill>
+                  <a:schemeClr val="bg1"/>
+                </a:solidFill>
+                <a:latin typeface="Poppins" pitchFamily="2" charset="77"/>
+                <a:cs typeface="Poppins" pitchFamily="2" charset="77"/>
+              </a:rPr>
+              <a:t>SHAP Values</a:t>
             </a:r>
           </a:p>
         </p:txBody>
       </p:sp>
+      <p:pic>
+        <p:nvPicPr>
+          <p:cNvPr id="6" name="Picture 5" descr="slide70_shap_summary.png"/>
+          <p:cNvPicPr>
+            <a:picLocks noChangeAspect="1"/>
+          </p:cNvPicPr>
+          <p:nvPr/>
+        </p:nvPicPr>
+        <p:blipFill>
+          <a:blip r:embed="rId2"/>
+          <a:stretch>
+            <a:fillRect/>
+          </a:stretch>
+        </p:blipFill>
+        <p:spPr>
+          <a:xfrm>
+            <a:off x="2780923" y="1764631"/>
+            <a:ext cx="6222408" cy="4262038"/>
+          </a:xfrm>
+          <a:prstGeom prst="rect">
+            <a:avLst/>
+          </a:prstGeom>
+        </p:spPr>
+      </p:pic>
       <p:sp>
         <p:nvSpPr>
-          <p:cNvPr id="3" name="Content Placeholder 2">
+          <p:cNvPr id="5" name="TextBox 4">
             <a:extLst>
               <a:ext uri="{FF2B5EF4-FFF2-40B4-BE49-F238E27FC236}">
-                <a16:creationId xmlns:a16="http://schemas.microsoft.com/office/drawing/2014/main" id="{D86CBB4A-EE3E-ED44-2256-BEF41E426FE4}"/>
+                <a16:creationId xmlns:a16="http://schemas.microsoft.com/office/drawing/2014/main" id="{ED04115D-E94B-A0F2-32BE-97EC25B892A5}"/>
               </a:ext>
             </a:extLst>
           </p:cNvPr>
-          <p:cNvSpPr>
-            <a:spLocks noGrp="1"/>
-          </p:cNvSpPr>
-          <p:nvPr>
-            <p:ph idx="1"/>
-          </p:nvPr>
+          <p:cNvSpPr txBox="1"/>
+          <p:nvPr/>
         </p:nvSpPr>
-        <p:spPr/>
+        <p:spPr>
+          <a:xfrm>
+            <a:off x="1507958" y="1251282"/>
+            <a:ext cx="9336505" cy="369332"/>
+          </a:xfrm>
+          <a:prstGeom prst="rect">
+            <a:avLst/>
+          </a:prstGeom>
+          <a:noFill/>
+        </p:spPr>
         <p:txBody>
-          <a:bodyPr>
-            <a:normAutofit fontScale="92500" lnSpcReduction="20000"/>
+          <a:bodyPr wrap="square" rtlCol="0">
+            <a:spAutoFit/>
           </a:bodyPr>
           <a:lstStyle/>
           <a:p>
-            <a:r>
-              <a:rPr lang="en-CA" dirty="0"/>
-              <a:t>Because of the complexity of many machine learning models, it is not possible to explain why they produce the output that they do other than to say it is based on the patterns they learned in the training data. </a:t>
-            </a:r>
-          </a:p>
-          <a:p>
-            <a:r>
-              <a:rPr lang="en-CA" dirty="0"/>
-              <a:t>This is an inherent weakness in establishing trustworthiness and credibility of many machine learning models. </a:t>
-            </a:r>
-          </a:p>
-          <a:p>
-            <a:r>
-              <a:rPr lang="en-CA" dirty="0"/>
-              <a:t>As stated earlier we turn to machine learning when we have examples, but we don’t know how to obtain the behavior we need using explicit instructions. </a:t>
-            </a:r>
-          </a:p>
-          <a:p>
-            <a:r>
-              <a:rPr lang="en-CA" dirty="0"/>
-              <a:t>We instead use the examples to train (adjust the parameters of) a model that  is then able to perform the desired behavior. </a:t>
-            </a:r>
-          </a:p>
-          <a:p>
-            <a:r>
-              <a:rPr lang="en-CA" dirty="0"/>
-              <a:t>In some cases of relatively simple models with few parameters (ex. Linear regression) we can interpret the meaning of the parameter values. </a:t>
-            </a:r>
-          </a:p>
-          <a:p>
-            <a:r>
-              <a:rPr lang="en-CA" dirty="0"/>
-              <a:t>But in general, for most models such as deep neural networks, we cannot explain model behavior based on parameter values.</a:t>
+            <a:pPr algn="ctr"/>
+            <a:r>
+              <a:rPr lang="en-US" b="1" dirty="0">
+                <a:solidFill>
+                  <a:schemeClr val="accent1"/>
+                </a:solidFill>
+                <a:latin typeface="Poppins" pitchFamily="2" charset="77"/>
+                <a:cs typeface="Poppins" pitchFamily="2" charset="77"/>
+              </a:rPr>
+              <a:t>SHAP Summary Plot: Feature Impact on Readmission Prediction (Global View)</a:t>
             </a:r>
           </a:p>
         </p:txBody>
@@ -16883,7 +16994,7 @@
     </p:spTree>
     <p:extLst>
       <p:ext uri="{BB962C8B-B14F-4D97-AF65-F5344CB8AC3E}">
-        <p14:creationId xmlns:p14="http://schemas.microsoft.com/office/powerpoint/2010/main" val="197764355"/>
+        <p14:creationId xmlns:p14="http://schemas.microsoft.com/office/powerpoint/2010/main" val="3645665708"/>
       </p:ext>
     </p:extLst>
   </p:cSld>
@@ -17037,13 +17148,6 @@
               </a:rPr>
               <a:t>Readmission risk - Predicting 30-day readmission from admission vitals</a:t>
             </a:r>
-            <a:r>
-              <a:rPr lang="en-CA" kern="100" dirty="0">
-                <a:ea typeface="Aptos" panose="020B0004020202020204" pitchFamily="34" charset="0"/>
-                <a:cs typeface="Poppins" pitchFamily="2" charset="77"/>
-              </a:rPr>
-              <a:t/>
-            </a:r>
           </a:p>
           <a:p>
             <a:pPr marL="457200">
@@ -17062,13 +17166,6 @@
               </a:rPr>
               <a:t>Length of stay prediction - Forecasting bed capacity and discharge timing</a:t>
             </a:r>
-            <a:r>
-              <a:rPr lang="en-CA" kern="100" dirty="0">
-                <a:ea typeface="Aptos" panose="020B0004020202020204" pitchFamily="34" charset="0"/>
-                <a:cs typeface="Poppins" pitchFamily="2" charset="77"/>
-              </a:rPr>
-              <a:t/>
-            </a:r>
           </a:p>
           <a:p>
             <a:pPr marL="457200">
@@ -17087,13 +17184,6 @@
               </a:rPr>
               <a:t>Demand forecasting - Short-term emergency department volume</a:t>
             </a:r>
-            <a:r>
-              <a:rPr lang="en-CA" kern="100" dirty="0">
-                <a:ea typeface="Aptos" panose="020B0004020202020204" pitchFamily="34" charset="0"/>
-                <a:cs typeface="Poppins" pitchFamily="2" charset="77"/>
-              </a:rPr>
-              <a:t/>
-            </a:r>
           </a:p>
           <a:p>
             <a:pPr marL="457200">
@@ -17112,13 +17202,6 @@
               </a:rPr>
               <a:t>Anomaly detection - Identifying anomalous telemetry or claims</a:t>
             </a:r>
-            <a:r>
-              <a:rPr lang="en-CA" kern="100" dirty="0">
-                <a:ea typeface="Aptos" panose="020B0004020202020204" pitchFamily="34" charset="0"/>
-                <a:cs typeface="Poppins" pitchFamily="2" charset="77"/>
-              </a:rPr>
-              <a:t/>
-            </a:r>
           </a:p>
           <a:p>
             <a:pPr marL="457200">
@@ -17137,13 +17220,6 @@
               </a:rPr>
               <a:t>Early warning scores - Threshold-based deterioration alerts</a:t>
             </a:r>
-            <a:r>
-              <a:rPr lang="en-CA" kern="100" dirty="0">
-                <a:ea typeface="Aptos" panose="020B0004020202020204" pitchFamily="34" charset="0"/>
-                <a:cs typeface="Poppins" pitchFamily="2" charset="77"/>
-              </a:rPr>
-              <a:t/>
-            </a:r>
           </a:p>
           <a:p>
             <a:pPr marL="457200">
@@ -17161,13 +17237,6 @@
                 <a:cs typeface="Poppins" pitchFamily="2" charset="77"/>
               </a:rPr>
               <a:t>Cost modelling - Understanding cost drivers per episode</a:t>
-            </a:r>
-            <a:r>
-              <a:rPr lang="en-CA" kern="100" dirty="0">
-                <a:ea typeface="Aptos" panose="020B0004020202020204" pitchFamily="34" charset="0"/>
-                <a:cs typeface="Poppins" pitchFamily="2" charset="77"/>
-              </a:rPr>
-              <a:t/>
             </a:r>
           </a:p>
           <a:p>
@@ -17274,13 +17343,6 @@
               </a:rPr>
               <a:t>Radiology image analysis - Detecting pathology on X-ray and CT</a:t>
             </a:r>
-            <a:r>
-              <a:rPr lang="en-CA" kern="100" dirty="0">
-                <a:ea typeface="Aptos" panose="020B0004020202020204" pitchFamily="34" charset="0"/>
-                <a:cs typeface="Poppins" pitchFamily="2" charset="77"/>
-              </a:rPr>
-              <a:t/>
-            </a:r>
           </a:p>
           <a:p>
             <a:pPr marL="457200">
@@ -17299,13 +17361,6 @@
               </a:rPr>
               <a:t>Digital pathology - Tumour detection and grading from slides</a:t>
             </a:r>
-            <a:r>
-              <a:rPr lang="en-CA" kern="100" dirty="0">
-                <a:ea typeface="Aptos" panose="020B0004020202020204" pitchFamily="34" charset="0"/>
-                <a:cs typeface="Poppins" pitchFamily="2" charset="77"/>
-              </a:rPr>
-              <a:t/>
-            </a:r>
           </a:p>
           <a:p>
             <a:pPr marL="457200">
@@ -17324,13 +17379,6 @@
               </a:rPr>
               <a:t>Clinical language models - Summarising notes and drafting documentation</a:t>
             </a:r>
-            <a:r>
-              <a:rPr lang="en-CA" kern="100" dirty="0">
-                <a:ea typeface="Aptos" panose="020B0004020202020204" pitchFamily="34" charset="0"/>
-                <a:cs typeface="Poppins" pitchFamily="2" charset="77"/>
-              </a:rPr>
-              <a:t/>
-            </a:r>
           </a:p>
           <a:p>
             <a:pPr marL="457200">
@@ -17349,13 +17397,6 @@
               </a:rPr>
               <a:t>Continuous monitoring - Detecting falls and patient deterioration on video</a:t>
             </a:r>
-            <a:r>
-              <a:rPr lang="en-CA" kern="100" dirty="0">
-                <a:ea typeface="Aptos" panose="020B0004020202020204" pitchFamily="34" charset="0"/>
-                <a:cs typeface="Poppins" pitchFamily="2" charset="77"/>
-              </a:rPr>
-              <a:t/>
-            </a:r>
           </a:p>
           <a:p>
             <a:pPr marL="457200">
@@ -17374,13 +17415,6 @@
               </a:rPr>
               <a:t>Retinal screening - Grading diabetic retinopathy from fundus images</a:t>
             </a:r>
-            <a:r>
-              <a:rPr lang="en-CA" kern="100" dirty="0">
-                <a:ea typeface="Aptos" panose="020B0004020202020204" pitchFamily="34" charset="0"/>
-                <a:cs typeface="Poppins" pitchFamily="2" charset="77"/>
-              </a:rPr>
-              <a:t/>
-            </a:r>
           </a:p>
           <a:p>
             <a:pPr marL="457200">
@@ -17398,13 +17432,6 @@
                 <a:cs typeface="Poppins" pitchFamily="2" charset="77"/>
               </a:rPr>
               <a:t>ECG rhythm classification - Distinguishing arrhythmias from normal sinus rhythm</a:t>
-            </a:r>
-            <a:r>
-              <a:rPr lang="en-CA" kern="100" dirty="0">
-                <a:ea typeface="Aptos" panose="020B0004020202020204" pitchFamily="34" charset="0"/>
-                <a:cs typeface="Poppins" pitchFamily="2" charset="77"/>
-              </a:rPr>
-              <a:t/>
             </a:r>
           </a:p>
         </p:txBody>
@@ -17423,153 +17450,6 @@
 </file>
 
 <file path=ppt/slides/slide30.xml><?xml version="1.0" encoding="utf-8"?>
-<p:sld xmlns:a="http://schemas.openxmlformats.org/drawingml/2006/main" xmlns:r="http://schemas.openxmlformats.org/officeDocument/2006/relationships" xmlns:p="http://schemas.openxmlformats.org/presentationml/2006/main">
-  <p:cSld>
-    <p:spTree>
-      <p:nvGrpSpPr>
-        <p:cNvPr id="1" name=""/>
-        <p:cNvGrpSpPr/>
-        <p:nvPr/>
-      </p:nvGrpSpPr>
-      <p:grpSpPr>
-        <a:xfrm>
-          <a:off x="0" y="0"/>
-          <a:ext cx="0" cy="0"/>
-          <a:chOff x="0" y="0"/>
-          <a:chExt cx="0" cy="0"/>
-        </a:xfrm>
-      </p:grpSpPr>
-      <p:sp>
-        <p:nvSpPr>
-          <p:cNvPr id="3" name="TextBox 2">
-            <a:extLst>
-              <a:ext uri="{FF2B5EF4-FFF2-40B4-BE49-F238E27FC236}">
-                <a16:creationId xmlns:a16="http://schemas.microsoft.com/office/drawing/2014/main" id="{2D36A175-458E-7256-BCDD-E9530E29E106}"/>
-              </a:ext>
-            </a:extLst>
-          </p:cNvPr>
-          <p:cNvSpPr txBox="1"/>
-          <p:nvPr/>
-        </p:nvSpPr>
-        <p:spPr>
-          <a:xfrm>
-            <a:off x="246491" y="318052"/>
-            <a:ext cx="7609398" cy="338554"/>
-          </a:xfrm>
-          <a:prstGeom prst="rect">
-            <a:avLst/>
-          </a:prstGeom>
-          <a:noFill/>
-        </p:spPr>
-        <p:txBody>
-          <a:bodyPr wrap="square" rtlCol="0">
-            <a:spAutoFit/>
-          </a:bodyPr>
-          <a:lstStyle/>
-          <a:p>
-            <a:r>
-              <a:rPr lang="en-US" sz="1600" b="1" dirty="0">
-                <a:solidFill>
-                  <a:schemeClr val="bg1"/>
-                </a:solidFill>
-                <a:latin typeface="Poppins" pitchFamily="2" charset="77"/>
-                <a:cs typeface="Poppins" pitchFamily="2" charset="77"/>
-              </a:rPr>
-              <a:t>Explainability – </a:t>
-            </a:r>
-            <a:r>
-              <a:rPr lang="en-US" sz="1600" dirty="0">
-                <a:solidFill>
-                  <a:schemeClr val="bg1"/>
-                </a:solidFill>
-                <a:latin typeface="Poppins" pitchFamily="2" charset="77"/>
-                <a:cs typeface="Poppins" pitchFamily="2" charset="77"/>
-              </a:rPr>
-              <a:t>SHAP Values</a:t>
-            </a:r>
-          </a:p>
-        </p:txBody>
-      </p:sp>
-      <p:pic>
-        <p:nvPicPr>
-          <p:cNvPr id="6" name="Picture 5" descr="slide70_shap_summary.png"/>
-          <p:cNvPicPr>
-            <a:picLocks noChangeAspect="1"/>
-          </p:cNvPicPr>
-          <p:nvPr/>
-        </p:nvPicPr>
-        <p:blipFill>
-          <a:blip r:embed="rId4"/>
-          <a:stretch>
-            <a:fillRect/>
-          </a:stretch>
-        </p:blipFill>
-        <p:spPr>
-          <a:xfrm>
-            <a:off x="2780923" y="1764631"/>
-            <a:ext cx="6222408" cy="4262038"/>
-          </a:xfrm>
-          <a:prstGeom prst="rect">
-            <a:avLst/>
-          </a:prstGeom>
-        </p:spPr>
-      </p:pic>
-      <p:sp>
-        <p:nvSpPr>
-          <p:cNvPr id="5" name="TextBox 4">
-            <a:extLst>
-              <a:ext uri="{FF2B5EF4-FFF2-40B4-BE49-F238E27FC236}">
-                <a16:creationId xmlns:a16="http://schemas.microsoft.com/office/drawing/2014/main" id="{ED04115D-E94B-A0F2-32BE-97EC25B892A5}"/>
-              </a:ext>
-            </a:extLst>
-          </p:cNvPr>
-          <p:cNvSpPr txBox="1"/>
-          <p:nvPr/>
-        </p:nvSpPr>
-        <p:spPr>
-          <a:xfrm>
-            <a:off x="1507958" y="1251282"/>
-            <a:ext cx="9336505" cy="369332"/>
-          </a:xfrm>
-          <a:prstGeom prst="rect">
-            <a:avLst/>
-          </a:prstGeom>
-          <a:noFill/>
-        </p:spPr>
-        <p:txBody>
-          <a:bodyPr wrap="square" rtlCol="0">
-            <a:spAutoFit/>
-          </a:bodyPr>
-          <a:lstStyle/>
-          <a:p>
-            <a:pPr algn="ctr"/>
-            <a:r>
-              <a:rPr lang="en-US" b="1" dirty="0">
-                <a:solidFill>
-                  <a:schemeClr val="accent1"/>
-                </a:solidFill>
-                <a:latin typeface="Poppins" pitchFamily="2" charset="77"/>
-                <a:cs typeface="Poppins" pitchFamily="2" charset="77"/>
-              </a:rPr>
-              <a:t>SHAP Summary Plot: Feature Impact on Readmission Prediction (Global View)</a:t>
-            </a:r>
-          </a:p>
-        </p:txBody>
-      </p:sp>
-    </p:spTree>
-    <p:extLst>
-      <p:ext uri="{BB962C8B-B14F-4D97-AF65-F5344CB8AC3E}">
-        <p14:creationId xmlns:p14="http://schemas.microsoft.com/office/powerpoint/2010/main" val="3645665708"/>
-      </p:ext>
-    </p:extLst>
-  </p:cSld>
-  <p:clrMapOvr>
-    <a:masterClrMapping/>
-  </p:clrMapOvr>
-</p:sld>
-</file>
-
-<file path=ppt/slides/slide31.xml><?xml version="1.0" encoding="utf-8"?>
 <p:sld xmlns:a="http://schemas.openxmlformats.org/drawingml/2006/main" xmlns:r="http://schemas.openxmlformats.org/officeDocument/2006/relationships" xmlns:p="http://schemas.openxmlformats.org/presentationml/2006/main">
   <p:cSld>
     <p:spTree>
@@ -17667,8 +17547,8 @@
 </p:sld>
 </file>
 
-<file path=ppt/slides/slide32.xml><?xml version="1.0" encoding="utf-8"?>
-<p:sld xmlns:a="http://schemas.openxmlformats.org/drawingml/2006/main" xmlns:p="http://schemas.openxmlformats.org/presentationml/2006/main" xmlns:r="http://schemas.openxmlformats.org/officeDocument/2006/relationships">
+<file path=ppt/slides/slide31.xml><?xml version="1.0" encoding="utf-8"?>
+<p:sld xmlns:a="http://schemas.openxmlformats.org/drawingml/2006/main" xmlns:r="http://schemas.openxmlformats.org/officeDocument/2006/relationships" xmlns:p="http://schemas.openxmlformats.org/presentationml/2006/main">
   <p:cSld>
     <p:spTree>
       <p:nvGrpSpPr>
@@ -17676,7 +17556,14 @@
         <p:cNvGrpSpPr/>
         <p:nvPr/>
       </p:nvGrpSpPr>
-      <p:grpSpPr/>
+      <p:grpSpPr>
+        <a:xfrm>
+          <a:off x="0" y="0"/>
+          <a:ext cx="0" cy="0"/>
+          <a:chOff x="0" y="0"/>
+          <a:chExt cx="0" cy="0"/>
+        </a:xfrm>
+      </p:grpSpPr>
       <p:sp>
         <p:nvSpPr>
           <p:cNvPr id="2" name="Title 1"/>
@@ -17713,37 +17600,31 @@
           <a:bodyPr/>
           <a:lstStyle/>
           <a:p>
-            <a:pPr/>
             <a:r>
               <a:t>Software that informs a clinical decision may be a regulated medical device, usually described as Software as a Medical Device.</a:t>
             </a:r>
           </a:p>
           <a:p>
-            <a:pPr/>
             <a:r>
               <a:t>Health Canada and the FDA both regulate on this basis. Risk class depends on how serious the condition is and how much weight the software carries in the decision.</a:t>
             </a:r>
           </a:p>
           <a:p>
-            <a:pPr/>
             <a:r>
               <a:t>A tool that supports a clinician who can independently review its basis is treated differently from one that drives the decision.</a:t>
             </a:r>
           </a:p>
           <a:p>
-            <a:pPr/>
             <a:r>
               <a:t>A locked model and a model that keeps learning after deployment are treated very differently. Continuous learning raises the bar considerably.</a:t>
             </a:r>
           </a:p>
           <a:p>
-            <a:pPr/>
             <a:r>
               <a:t>Internal quality-improvement use follows a different path from a commercial product. It is not an exemption from governance.</a:t>
             </a:r>
           </a:p>
           <a:p>
-            <a:pPr/>
             <a:r>
               <a:t>Decide this early. The pathway determines what evidence you must collect, and it is expensive to reconstruct afterwards.</a:t>
             </a:r>
@@ -17758,8 +17639,8 @@
 </p:sld>
 </file>
 
-<file path=ppt/slides/slide33.xml><?xml version="1.0" encoding="utf-8"?>
-<p:sld xmlns:a="http://schemas.openxmlformats.org/drawingml/2006/main" xmlns:p="http://schemas.openxmlformats.org/presentationml/2006/main" xmlns:r="http://schemas.openxmlformats.org/officeDocument/2006/relationships">
+<file path=ppt/slides/slide32.xml><?xml version="1.0" encoding="utf-8"?>
+<p:sld xmlns:a="http://schemas.openxmlformats.org/drawingml/2006/main" xmlns:r="http://schemas.openxmlformats.org/officeDocument/2006/relationships" xmlns:p="http://schemas.openxmlformats.org/presentationml/2006/main">
   <p:cSld>
     <p:spTree>
       <p:nvGrpSpPr>
@@ -17767,7 +17648,14 @@
         <p:cNvGrpSpPr/>
         <p:nvPr/>
       </p:nvGrpSpPr>
-      <p:grpSpPr/>
+      <p:grpSpPr>
+        <a:xfrm>
+          <a:off x="0" y="0"/>
+          <a:ext cx="0" cy="0"/>
+          <a:chOff x="0" y="0"/>
+          <a:chExt cx="0" cy="0"/>
+        </a:xfrm>
+      </p:grpSpPr>
       <p:sp>
         <p:nvSpPr>
           <p:cNvPr id="2" name="Title 1"/>
@@ -17804,25 +17692,21 @@
           <a:bodyPr/>
           <a:lstStyle/>
           <a:p>
-            <a:pPr/>
             <a:r>
               <a:t>Alert fatigue is the most common way a technically sound model delivers nothing. Clinicians learn to dismiss alerts that are usually wrong.</a:t>
             </a:r>
           </a:p>
           <a:p>
-            <a:pPr/>
             <a:r>
               <a:t>Automation bias is the opposite failure: a confident score displaces clinical judgement, most often with junior staff at night.</a:t>
             </a:r>
           </a:p>
           <a:p>
-            <a:pPr/>
             <a:r>
               <a:t>Both are design problems, not user problems.</a:t>
             </a:r>
           </a:p>
           <a:p>
-            <a:pPr/>
             <a:r>
               <a:t>Questions to settle before launch:</a:t>
             </a:r>
@@ -17846,7 +17730,6 @@
             </a:r>
           </a:p>
           <a:p>
-            <a:pPr/>
             <a:r>
               <a:t>Measure the intervention, not the prediction. Alerts acted on, time to treatment, outcome.</a:t>
             </a:r>
@@ -17861,8 +17744,8 @@
 </p:sld>
 </file>
 
-<file path=ppt/slides/slide34.xml><?xml version="1.0" encoding="utf-8"?>
-<p:sld xmlns:a="http://schemas.openxmlformats.org/drawingml/2006/main" xmlns:p="http://schemas.openxmlformats.org/presentationml/2006/main" xmlns:r="http://schemas.openxmlformats.org/officeDocument/2006/relationships">
+<file path=ppt/slides/slide33.xml><?xml version="1.0" encoding="utf-8"?>
+<p:sld xmlns:a="http://schemas.openxmlformats.org/drawingml/2006/main" xmlns:r="http://schemas.openxmlformats.org/officeDocument/2006/relationships" xmlns:p="http://schemas.openxmlformats.org/presentationml/2006/main">
   <p:cSld>
     <p:spTree>
       <p:nvGrpSpPr>
@@ -17870,7 +17753,14 @@
         <p:cNvGrpSpPr/>
         <p:nvPr/>
       </p:nvGrpSpPr>
-      <p:grpSpPr/>
+      <p:grpSpPr>
+        <a:xfrm>
+          <a:off x="0" y="0"/>
+          <a:ext cx="0" cy="0"/>
+          <a:chOff x="0" y="0"/>
+          <a:chExt cx="0" cy="0"/>
+        </a:xfrm>
+      </p:grpSpPr>
       <p:sp>
         <p:nvSpPr>
           <p:cNvPr id="2" name="Title 1"/>
@@ -17920,7 +17810,7 @@
             <a:spLocks noGrp="1"/>
           </p:cNvSpPr>
           <p:nvPr>
-            <p:ph idx="2" sz="half"/>
+            <p:ph sz="half" idx="2"/>
           </p:nvPr>
         </p:nvSpPr>
         <p:spPr/>
@@ -17928,31 +17818,26 @@
           <a:bodyPr/>
           <a:lstStyle/>
           <a:p>
-            <a:pPr/>
             <a:r>
               <a:t>External validation on your own population</a:t>
             </a:r>
           </a:p>
           <a:p>
-            <a:pPr/>
             <a:r>
               <a:t>Calibration checked locally, not inherited</a:t>
             </a:r>
           </a:p>
           <a:p>
-            <a:pPr/>
             <a:r>
               <a:t>Performance reported by subgroup</a:t>
             </a:r>
           </a:p>
           <a:p>
-            <a:pPr/>
             <a:r>
               <a:t>Prospective silent run completed</a:t>
             </a:r>
           </a:p>
           <a:p>
-            <a:pPr/>
             <a:r>
               <a:t>Failure modes documented in both directions</a:t>
             </a:r>
@@ -17966,7 +17851,7 @@
             <a:spLocks noGrp="1"/>
           </p:cNvSpPr>
           <p:nvPr>
-            <p:ph type="body" idx="3" sz="quarter"/>
+            <p:ph type="body" sz="quarter" idx="3"/>
           </p:nvPr>
         </p:nvSpPr>
         <p:spPr/>
@@ -17987,7 +17872,7 @@
             <a:spLocks noGrp="1"/>
           </p:cNvSpPr>
           <p:nvPr>
-            <p:ph idx="4" sz="quarter"/>
+            <p:ph sz="quarter" idx="4"/>
           </p:nvPr>
         </p:nvSpPr>
         <p:spPr/>
@@ -17995,37 +17880,31 @@
           <a:bodyPr/>
           <a:lstStyle/>
           <a:p>
-            <a:pPr/>
             <a:r>
               <a:t>A named clinical owner</a:t>
             </a:r>
           </a:p>
           <a:p>
-            <a:pPr/>
             <a:r>
               <a:t>A defined action for each output</a:t>
             </a:r>
           </a:p>
           <a:p>
-            <a:pPr/>
             <a:r>
               <a:t>Monitoring for drift and for alert burden</a:t>
             </a:r>
           </a:p>
           <a:p>
-            <a:pPr/>
             <a:r>
               <a:t>A route to switch it off, and someone empowered to use it</a:t>
             </a:r>
           </a:p>
           <a:p>
-            <a:pPr/>
             <a:r>
               <a:t>Privacy and information governance review</a:t>
             </a:r>
           </a:p>
           <a:p>
-            <a:pPr/>
             <a:r>
               <a:t>A documented decision on regulatory status</a:t>
             </a:r>
@@ -18040,7 +17919,7 @@
 </p:sld>
 </file>
 
-<file path=ppt/slides/slide35.xml><?xml version="1.0" encoding="utf-8"?>
+<file path=ppt/slides/slide34.xml><?xml version="1.0" encoding="utf-8"?>
 <p:sld xmlns:a="http://schemas.openxmlformats.org/drawingml/2006/main" xmlns:r="http://schemas.openxmlformats.org/officeDocument/2006/relationships" xmlns:p="http://schemas.openxmlformats.org/presentationml/2006/main">
   <p:cSld>
     <p:spTree>
@@ -18169,8 +18048,8 @@
 </p:sld>
 </file>
 
-<file path=ppt/slides/slide36.xml><?xml version="1.0" encoding="utf-8"?>
-<p:sld xmlns:a="http://schemas.openxmlformats.org/drawingml/2006/main" xmlns:p="http://schemas.openxmlformats.org/presentationml/2006/main" xmlns:r="http://schemas.openxmlformats.org/officeDocument/2006/relationships">
+<file path=ppt/slides/slide35.xml><?xml version="1.0" encoding="utf-8"?>
+<p:sld xmlns:a="http://schemas.openxmlformats.org/drawingml/2006/main" xmlns:r="http://schemas.openxmlformats.org/officeDocument/2006/relationships" xmlns:p="http://schemas.openxmlformats.org/presentationml/2006/main">
   <p:cSld>
     <p:spTree>
       <p:nvGrpSpPr>
@@ -18178,7 +18057,14 @@
         <p:cNvGrpSpPr/>
         <p:nvPr/>
       </p:nvGrpSpPr>
-      <p:grpSpPr/>
+      <p:grpSpPr>
+        <a:xfrm>
+          <a:off x="0" y="0"/>
+          <a:ext cx="0" cy="0"/>
+          <a:chOff x="0" y="0"/>
+          <a:chExt cx="0" cy="0"/>
+        </a:xfrm>
+      </p:grpSpPr>
       <p:sp>
         <p:nvSpPr>
           <p:cNvPr id="2" name="Title 1"/>
@@ -18215,62 +18101,62 @@
           <a:bodyPr/>
           <a:lstStyle/>
           <a:p>
-            <a:pPr/>
-            <a:r>
+            <a:r>
+              <a:rPr dirty="0"/>
               <a:t>The notebooks accompanying this series cover every model we discussed, with runnable code and simulated clinical data.</a:t>
             </a:r>
           </a:p>
           <a:p>
-            <a:pPr/>
-            <a:r>
+            <a:r>
+              <a:rPr dirty="0"/>
               <a:t>Start with a problem where you already hold the data and there is a clear decision that could change.</a:t>
             </a:r>
           </a:p>
           <a:p>
-            <a:pPr/>
-            <a:r>
+            <a:r>
+              <a:rPr dirty="0"/>
               <a:t>Prove value in a silent run before anyone relies on the output.</a:t>
             </a:r>
           </a:p>
           <a:p>
-            <a:pPr/>
-            <a:r>
+            <a:r>
+              <a:rPr dirty="0"/>
               <a:t>Build the monitoring before the model, not after it.</a:t>
             </a:r>
           </a:p>
           <a:p>
-            <a:pPr/>
-            <a:r>
+            <a:r>
+              <a:rPr dirty="0"/>
               <a:t>Worth reading:</a:t>
             </a:r>
           </a:p>
           <a:p>
-            <a:pPr/>
-            <a:r>
+            <a:r>
+              <a:rPr dirty="0"/>
               <a:t>TRIPOD+AI (2024), for what a clinical prediction model should report</a:t>
             </a:r>
           </a:p>
           <a:p>
-            <a:pPr/>
-            <a:r>
+            <a:r>
+              <a:rPr dirty="0"/>
               <a:t>Obermeyer et al., Science 2019, on how a proxy label encodes inequity</a:t>
             </a:r>
           </a:p>
           <a:p>
-            <a:pPr/>
-            <a:r>
+            <a:r>
+              <a:rPr dirty="0"/>
               <a:t>Your own institution's AI governance policy, which probably exists and is probably unread</a:t>
             </a:r>
           </a:p>
           <a:p>
-            <a:pPr/>
-            <a:r>
+            <a:r>
+              <a:rPr dirty="0"/>
               <a:t>Session 4 takes the next step: what changes when a model stops predicting and starts acting.</a:t>
             </a:r>
           </a:p>
           <a:p>
-            <a:pPr/>
-            <a:r>
+            <a:r>
+              <a:rPr dirty="0"/>
               <a:t>The hardest part is rarely the model.</a:t>
             </a:r>
           </a:p>
@@ -18284,7 +18170,7 @@
 </p:sld>
 </file>
 
-<file path=ppt/slides/slide37.xml><?xml version="1.0" encoding="utf-8"?>
+<file path=ppt/slides/slide36.xml><?xml version="1.0" encoding="utf-8"?>
 <p:sld xmlns:a="http://schemas.openxmlformats.org/drawingml/2006/main" xmlns:r="http://schemas.openxmlformats.org/officeDocument/2006/relationships" xmlns:p="http://schemas.openxmlformats.org/presentationml/2006/main">
   <p:cSld>
     <p:spTree>
@@ -18329,36 +18215,6 @@
           </a:p>
         </p:txBody>
       </p:sp>
-      <p:pic>
-        <p:nvPicPr>
-          <p:cNvPr id="3" name="Picture 2">
-            <a:extLst>
-              <a:ext uri="{FF2B5EF4-FFF2-40B4-BE49-F238E27FC236}">
-                <a16:creationId xmlns:a16="http://schemas.microsoft.com/office/drawing/2014/main" id="{0AD34D1E-A83B-4094-141E-C3D13FA3927C}"/>
-              </a:ext>
-            </a:extLst>
-          </p:cNvPr>
-          <p:cNvPicPr>
-            <a:picLocks noChangeAspect="1"/>
-          </p:cNvPicPr>
-          <p:nvPr/>
-        </p:nvPicPr>
-        <p:blipFill>
-          <a:blip r:embed="rId2"/>
-          <a:stretch>
-            <a:fillRect/>
-          </a:stretch>
-        </p:blipFill>
-        <p:spPr>
-          <a:xfrm>
-            <a:off x="5153919" y="759103"/>
-            <a:ext cx="5117422" cy="5330650"/>
-          </a:xfrm>
-          <a:prstGeom prst="rect">
-            <a:avLst/>
-          </a:prstGeom>
-        </p:spPr>
-      </p:pic>
     </p:spTree>
     <p:extLst>
       <p:ext uri="{BB962C8B-B14F-4D97-AF65-F5344CB8AC3E}">
@@ -18718,7 +18574,7 @@
           <p:nvPr/>
         </p:nvPicPr>
         <p:blipFill>
-          <a:blip r:embed="rId4"/>
+          <a:blip r:embed="rId2"/>
           <a:stretch>
             <a:fillRect/>
           </a:stretch>
